--- a/canvas_material/lectures/powerpoint/Session05-Feasibility.pptx
+++ b/canvas_material/lectures/powerpoint/Session05-Feasibility.pptx
@@ -1573,7 +1573,7 @@
           <a:p>
             <a:r>
               <a:rPr lang="en-US" dirty="0"/>
-              <a:t>Fill this table live rather than revealing it — ask the room for each read and why. The teaching moment is the two highlighted rows: Technical and Skill both point at real-time sync. Say it out loud — two scary boxes collapse into one thing to investigate. That single unknown is what the spike (next) targets, and what the learning plan (later) closes. QueueUp is a teaching vehicle, not a suggested project — students find their own.</a:t>
+              <a:t>Fill this table live — the slide is the board. The six categories and the empty grid are up; each click fills one row's Read and Why, so ask the room first, take the answer, then click. Rows 2, 3, 5 and 6 all read Med — if someone argues High, take it and then give your read rather than letting the click contradict them. The two that must land are Technical and Skill. On Adoption, push past "would you use it" to the discovery habit from last week: the pain to confirm is "I get skipped / I don't know my place," not the app idea. Only after all six are rated does the last click drop the two amber bands and the takeaway — that's the second move from the previous slide: rate all six, then look across and circle. Say it out loud: two scary boxes, one root cause, and that single unknown is what the spike targets next and what the learning plan closes later. QueueUp is a teaching vehicle, not a suggested project.</a:t>
             </a:r>
             <a:endParaRPr lang="en-US" dirty="0"/>
           </a:p>
@@ -10043,7 +10043,7 @@
                 <a:ea typeface="Cambria" pitchFamily="34" charset="-122"/>
                 <a:cs typeface="Cambria" pitchFamily="34" charset="-120"/>
               </a:rPr>
-              <a:t>Two risk boxes, one root cause</a:t>
+              <a:t>Six risks, one honest pass</a:t>
             </a:r>
             <a:endParaRPr lang="en-US" sz="3100" dirty="0"/>
           </a:p>
@@ -10088,1493 +10088,1019 @@
           </a:p>
         </p:txBody>
       </p:sp>
-      <p:graphicFrame>
-        <p:nvGraphicFramePr>
-          <p:cNvPr id="7" name="Table 0"/>
-          <p:cNvGraphicFramePr>
-            <a:graphicFrameLocks noGrp="1"/>
-          </p:cNvGraphicFramePr>
-          <p:nvPr>
-            <p:extLst>
-              <p:ext uri="{D42A27DB-BD31-4B8C-83A1-F6EECF244321}">
-                <p14:modId xmlns:p14="http://schemas.microsoft.com/office/powerpoint/2010/main" val="1579011935"/>
-              </p:ext>
-            </p:extLst>
-          </p:nvPr>
-        </p:nvGraphicFramePr>
-        <p:xfrm>
-          <a:off x="548640" y="1938528"/>
-          <a:ext cx="11064240" cy="914400"/>
-        </p:xfrm>
-        <a:graphic>
-          <a:graphicData uri="http://schemas.openxmlformats.org/drawingml/2006/table">
-            <a:tbl>
-              <a:tblPr/>
-              <a:tblGrid>
-                <a:gridCol w="2286000"/>
-                <a:gridCol w="1188720"/>
-                <a:gridCol w="7589520"/>
-              </a:tblGrid>
-              <a:tr h="475488">
-                <a:tc>
-                  <a:txBody>
-                    <a:bodyPr/>
-                    <a:lstStyle/>
-                    <a:p>
-                      <a:pPr algn="l" indent="0" marL="0">
-                        <a:buNone/>
-                      </a:pPr>
-                      <a:r>
-                        <a:rPr lang="en-US" sz="1400" b="1" dirty="0">
-                          <a:solidFill>
-                            <a:srgbClr val="FFFFFF"/>
-                          </a:solidFill>
-                          <a:latin typeface="Calibri" pitchFamily="34" charset="0"/>
-                          <a:ea typeface="Calibri" pitchFamily="34" charset="-122"/>
-                          <a:cs typeface="Calibri" pitchFamily="34" charset="-120"/>
-                        </a:rPr>
-                        <a:t>Category</a:t>
-                      </a:r>
-                      <a:endParaRPr lang="en-US" sz="1400" dirty="0">
-                        <a:latin typeface="Calibri" charset="0"/>
-                        <a:ea typeface="Calibri" charset="0"/>
-                        <a:cs typeface="Calibri" charset="0"/>
-                      </a:endParaRPr>
-                    </a:p>
-                  </a:txBody>
-                  <a:tcPr marL="114300" marR="114300" marT="38100" marB="38100" anchor="ctr">
-                    <a:lnL w="25400" cap="flat" cmpd="sng" algn="ctr">
-                      <a:solidFill>
-                        <a:srgbClr val="FFFFFF"/>
-                      </a:solidFill>
-                      <a:prstDash val="solid"/>
-                      <a:round/>
-                      <a:headEnd type="none" w="med" len="med"/>
-                      <a:tailEnd type="none" w="med" len="med"/>
-                    </a:lnL>
-                    <a:lnR w="25400" cap="flat" cmpd="sng" algn="ctr">
-                      <a:solidFill>
-                        <a:srgbClr val="FFFFFF"/>
-                      </a:solidFill>
-                      <a:prstDash val="solid"/>
-                      <a:round/>
-                      <a:headEnd type="none" w="med" len="med"/>
-                      <a:tailEnd type="none" w="med" len="med"/>
-                    </a:lnR>
-                    <a:lnT w="25400" cap="flat" cmpd="sng" algn="ctr">
-                      <a:solidFill>
-                        <a:srgbClr val="FFFFFF"/>
-                      </a:solidFill>
-                      <a:prstDash val="solid"/>
-                      <a:round/>
-                      <a:headEnd type="none" w="med" len="med"/>
-                      <a:tailEnd type="none" w="med" len="med"/>
-                    </a:lnT>
-                    <a:lnB w="25400" cap="flat" cmpd="sng" algn="ctr">
-                      <a:solidFill>
-                        <a:srgbClr val="FFFFFF"/>
-                      </a:solidFill>
-                      <a:prstDash val="solid"/>
-                      <a:round/>
-                      <a:headEnd type="none" w="med" len="med"/>
-                      <a:tailEnd type="none" w="med" len="med"/>
-                    </a:lnB>
-                    <a:solidFill>
-                      <a:srgbClr val="14233A"/>
-                    </a:solidFill>
-                  </a:tcPr>
-                </a:tc>
-                <a:tc>
-                  <a:txBody>
-                    <a:bodyPr/>
-                    <a:lstStyle/>
-                    <a:p>
-                      <a:pPr algn="ctr" indent="0" marL="0">
-                        <a:buNone/>
-                      </a:pPr>
-                      <a:r>
-                        <a:rPr lang="en-US" sz="1400" b="1" dirty="0">
-                          <a:solidFill>
-                            <a:srgbClr val="FFFFFF"/>
-                          </a:solidFill>
-                          <a:latin typeface="Calibri" pitchFamily="34" charset="0"/>
-                          <a:ea typeface="Calibri" pitchFamily="34" charset="-122"/>
-                          <a:cs typeface="Calibri" pitchFamily="34" charset="-120"/>
-                        </a:rPr>
-                        <a:t>Read</a:t>
-                      </a:r>
-                      <a:endParaRPr lang="en-US" sz="1400" dirty="0">
-                        <a:latin typeface="Calibri" charset="0"/>
-                        <a:ea typeface="Calibri" charset="0"/>
-                        <a:cs typeface="Calibri" charset="0"/>
-                      </a:endParaRPr>
-                    </a:p>
-                  </a:txBody>
-                  <a:tcPr marL="114300" marR="114300" marT="38100" marB="38100" anchor="ctr">
-                    <a:lnL w="25400" cap="flat" cmpd="sng" algn="ctr">
-                      <a:solidFill>
-                        <a:srgbClr val="FFFFFF"/>
-                      </a:solidFill>
-                      <a:prstDash val="solid"/>
-                      <a:round/>
-                      <a:headEnd type="none" w="med" len="med"/>
-                      <a:tailEnd type="none" w="med" len="med"/>
-                    </a:lnL>
-                    <a:lnR w="25400" cap="flat" cmpd="sng" algn="ctr">
-                      <a:solidFill>
-                        <a:srgbClr val="FFFFFF"/>
-                      </a:solidFill>
-                      <a:prstDash val="solid"/>
-                      <a:round/>
-                      <a:headEnd type="none" w="med" len="med"/>
-                      <a:tailEnd type="none" w="med" len="med"/>
-                    </a:lnR>
-                    <a:lnT w="25400" cap="flat" cmpd="sng" algn="ctr">
-                      <a:solidFill>
-                        <a:srgbClr val="FFFFFF"/>
-                      </a:solidFill>
-                      <a:prstDash val="solid"/>
-                      <a:round/>
-                      <a:headEnd type="none" w="med" len="med"/>
-                      <a:tailEnd type="none" w="med" len="med"/>
-                    </a:lnT>
-                    <a:lnB w="25400" cap="flat" cmpd="sng" algn="ctr">
-                      <a:solidFill>
-                        <a:srgbClr val="FFFFFF"/>
-                      </a:solidFill>
-                      <a:prstDash val="solid"/>
-                      <a:round/>
-                      <a:headEnd type="none" w="med" len="med"/>
-                      <a:tailEnd type="none" w="med" len="med"/>
-                    </a:lnB>
-                    <a:solidFill>
-                      <a:srgbClr val="14233A"/>
-                    </a:solidFill>
-                  </a:tcPr>
-                </a:tc>
-                <a:tc>
-                  <a:txBody>
-                    <a:bodyPr/>
-                    <a:lstStyle/>
-                    <a:p>
-                      <a:pPr algn="l" indent="0" marL="0">
-                        <a:buNone/>
-                      </a:pPr>
-                      <a:r>
-                        <a:rPr lang="en-US" sz="1400" b="1" dirty="0">
-                          <a:solidFill>
-                            <a:srgbClr val="FFFFFF"/>
-                          </a:solidFill>
-                          <a:latin typeface="Calibri" pitchFamily="34" charset="0"/>
-                          <a:ea typeface="Calibri" pitchFamily="34" charset="-122"/>
-                          <a:cs typeface="Calibri" pitchFamily="34" charset="-120"/>
-                        </a:rPr>
-                        <a:t>Why</a:t>
-                      </a:r>
-                      <a:endParaRPr lang="en-US" sz="1400" dirty="0">
-                        <a:latin typeface="Calibri" charset="0"/>
-                        <a:ea typeface="Calibri" charset="0"/>
-                        <a:cs typeface="Calibri" charset="0"/>
-                      </a:endParaRPr>
-                    </a:p>
-                  </a:txBody>
-                  <a:tcPr marL="114300" marR="114300" marT="38100" marB="38100" anchor="ctr">
-                    <a:lnL w="25400" cap="flat" cmpd="sng" algn="ctr">
-                      <a:solidFill>
-                        <a:srgbClr val="FFFFFF"/>
-                      </a:solidFill>
-                      <a:prstDash val="solid"/>
-                      <a:round/>
-                      <a:headEnd type="none" w="med" len="med"/>
-                      <a:tailEnd type="none" w="med" len="med"/>
-                    </a:lnL>
-                    <a:lnR w="25400" cap="flat" cmpd="sng" algn="ctr">
-                      <a:solidFill>
-                        <a:srgbClr val="FFFFFF"/>
-                      </a:solidFill>
-                      <a:prstDash val="solid"/>
-                      <a:round/>
-                      <a:headEnd type="none" w="med" len="med"/>
-                      <a:tailEnd type="none" w="med" len="med"/>
-                    </a:lnR>
-                    <a:lnT w="25400" cap="flat" cmpd="sng" algn="ctr">
-                      <a:solidFill>
-                        <a:srgbClr val="FFFFFF"/>
-                      </a:solidFill>
-                      <a:prstDash val="solid"/>
-                      <a:round/>
-                      <a:headEnd type="none" w="med" len="med"/>
-                      <a:tailEnd type="none" w="med" len="med"/>
-                    </a:lnT>
-                    <a:lnB w="25400" cap="flat" cmpd="sng" algn="ctr">
-                      <a:solidFill>
-                        <a:srgbClr val="FFFFFF"/>
-                      </a:solidFill>
-                      <a:prstDash val="solid"/>
-                      <a:round/>
-                      <a:headEnd type="none" w="med" len="med"/>
-                      <a:tailEnd type="none" w="med" len="med"/>
-                    </a:lnB>
-                    <a:solidFill>
-                      <a:srgbClr val="14233A"/>
-                    </a:solidFill>
-                  </a:tcPr>
-                </a:tc>
-              </a:tr>
-              <a:tr h="475488">
-                <a:tc>
-                  <a:txBody>
-                    <a:bodyPr/>
-                    <a:lstStyle/>
-                    <a:p>
-                      <a:pPr indent="0" marL="0">
-                        <a:buNone/>
-                      </a:pPr>
-                      <a:r>
-                        <a:rPr lang="en-US" sz="1400" b="1" dirty="0">
-                          <a:solidFill>
-                            <a:srgbClr val="1E2A36"/>
-                          </a:solidFill>
-                          <a:latin typeface="Calibri" pitchFamily="34" charset="0"/>
-                          <a:ea typeface="Calibri" pitchFamily="34" charset="-122"/>
-                          <a:cs typeface="Calibri" pitchFamily="34" charset="-120"/>
-                        </a:rPr>
-                        <a:t>Technical</a:t>
-                      </a:r>
-                      <a:endParaRPr lang="en-US" sz="1400" dirty="0">
-                        <a:latin typeface="Calibri" charset="0"/>
-                        <a:ea typeface="Calibri" charset="0"/>
-                        <a:cs typeface="Calibri" charset="0"/>
-                      </a:endParaRPr>
-                    </a:p>
-                  </a:txBody>
-                  <a:tcPr marL="114300" marR="114300" marT="38100" marB="38100" anchor="ctr">
-                    <a:lnL w="25400" cap="flat" cmpd="sng" algn="ctr">
-                      <a:solidFill>
-                        <a:srgbClr val="FFFFFF"/>
-                      </a:solidFill>
-                      <a:prstDash val="solid"/>
-                      <a:round/>
-                      <a:headEnd type="none" w="med" len="med"/>
-                      <a:tailEnd type="none" w="med" len="med"/>
-                    </a:lnL>
-                    <a:lnR w="25400" cap="flat" cmpd="sng" algn="ctr">
-                      <a:solidFill>
-                        <a:srgbClr val="FFFFFF"/>
-                      </a:solidFill>
-                      <a:prstDash val="solid"/>
-                      <a:round/>
-                      <a:headEnd type="none" w="med" len="med"/>
-                      <a:tailEnd type="none" w="med" len="med"/>
-                    </a:lnR>
-                    <a:lnT w="25400" cap="flat" cmpd="sng" algn="ctr">
-                      <a:solidFill>
-                        <a:srgbClr val="FFFFFF"/>
-                      </a:solidFill>
-                      <a:prstDash val="solid"/>
-                      <a:round/>
-                      <a:headEnd type="none" w="med" len="med"/>
-                      <a:tailEnd type="none" w="med" len="med"/>
-                    </a:lnT>
-                    <a:lnB w="25400" cap="flat" cmpd="sng" algn="ctr">
-                      <a:solidFill>
-                        <a:srgbClr val="FFFFFF"/>
-                      </a:solidFill>
-                      <a:prstDash val="solid"/>
-                      <a:round/>
-                      <a:headEnd type="none" w="med" len="med"/>
-                      <a:tailEnd type="none" w="med" len="med"/>
-                    </a:lnB>
-                    <a:solidFill>
-                      <a:srgbClr val="FBEAD2"/>
-                    </a:solidFill>
-                  </a:tcPr>
-                </a:tc>
-                <a:tc>
-                  <a:txBody>
-                    <a:bodyPr/>
-                    <a:lstStyle/>
-                    <a:p>
-                      <a:pPr algn="ctr" indent="0" marL="0">
-                        <a:buNone/>
-                      </a:pPr>
-                      <a:r>
-                        <a:rPr lang="en-US" sz="1400" b="1" dirty="0">
-                          <a:solidFill>
-                            <a:srgbClr val="D9614C"/>
-                          </a:solidFill>
-                          <a:latin typeface="Calibri" pitchFamily="34" charset="0"/>
-                          <a:ea typeface="Calibri" pitchFamily="34" charset="-122"/>
-                          <a:cs typeface="Calibri" pitchFamily="34" charset="-120"/>
-                        </a:rPr>
-                        <a:t>High</a:t>
-                      </a:r>
-                      <a:endParaRPr lang="en-US" sz="1400" dirty="0">
-                        <a:latin typeface="Calibri" charset="0"/>
-                        <a:ea typeface="Calibri" charset="0"/>
-                        <a:cs typeface="Calibri" charset="0"/>
-                      </a:endParaRPr>
-                    </a:p>
-                  </a:txBody>
-                  <a:tcPr marL="114300" marR="114300" marT="38100" marB="38100" anchor="ctr">
-                    <a:lnL w="25400" cap="flat" cmpd="sng" algn="ctr">
-                      <a:solidFill>
-                        <a:srgbClr val="FFFFFF"/>
-                      </a:solidFill>
-                      <a:prstDash val="solid"/>
-                      <a:round/>
-                      <a:headEnd type="none" w="med" len="med"/>
-                      <a:tailEnd type="none" w="med" len="med"/>
-                    </a:lnL>
-                    <a:lnR w="25400" cap="flat" cmpd="sng" algn="ctr">
-                      <a:solidFill>
-                        <a:srgbClr val="FFFFFF"/>
-                      </a:solidFill>
-                      <a:prstDash val="solid"/>
-                      <a:round/>
-                      <a:headEnd type="none" w="med" len="med"/>
-                      <a:tailEnd type="none" w="med" len="med"/>
-                    </a:lnR>
-                    <a:lnT w="25400" cap="flat" cmpd="sng" algn="ctr">
-                      <a:solidFill>
-                        <a:srgbClr val="FFFFFF"/>
-                      </a:solidFill>
-                      <a:prstDash val="solid"/>
-                      <a:round/>
-                      <a:headEnd type="none" w="med" len="med"/>
-                      <a:tailEnd type="none" w="med" len="med"/>
-                    </a:lnT>
-                    <a:lnB w="25400" cap="flat" cmpd="sng" algn="ctr">
-                      <a:solidFill>
-                        <a:srgbClr val="FFFFFF"/>
-                      </a:solidFill>
-                      <a:prstDash val="solid"/>
-                      <a:round/>
-                      <a:headEnd type="none" w="med" len="med"/>
-                      <a:tailEnd type="none" w="med" len="med"/>
-                    </a:lnB>
-                    <a:solidFill>
-                      <a:srgbClr val="FBEAD2"/>
-                    </a:solidFill>
-                  </a:tcPr>
-                </a:tc>
-                <a:tc>
-                  <a:txBody>
-                    <a:bodyPr/>
-                    <a:lstStyle/>
-                    <a:p>
-                      <a:pPr indent="0" marL="0">
-                        <a:buNone/>
-                      </a:pPr>
-                      <a:r>
-                        <a:rPr lang="en-US" sz="1350" dirty="0">
-                          <a:solidFill>
-                            <a:srgbClr val="1E2A36"/>
-                          </a:solidFill>
-                          <a:latin typeface="Calibri" pitchFamily="34" charset="0"/>
-                          <a:ea typeface="Calibri" pitchFamily="34" charset="-122"/>
-                          <a:cs typeface="Calibri" pitchFamily="34" charset="-120"/>
-                        </a:rPr>
-                        <a:t>Live queue pushed to every client in ~1s — never done real-time</a:t>
-                      </a:r>
-                      <a:endParaRPr lang="en-US" sz="1350" dirty="0">
-                        <a:latin typeface="Calibri" charset="0"/>
-                        <a:ea typeface="Calibri" charset="0"/>
-                        <a:cs typeface="Calibri" charset="0"/>
-                      </a:endParaRPr>
-                    </a:p>
-                  </a:txBody>
-                  <a:tcPr marL="114300" marR="114300" marT="38100" marB="38100" anchor="ctr">
-                    <a:lnL w="25400" cap="flat" cmpd="sng" algn="ctr">
-                      <a:solidFill>
-                        <a:srgbClr val="FFFFFF"/>
-                      </a:solidFill>
-                      <a:prstDash val="solid"/>
-                      <a:round/>
-                      <a:headEnd type="none" w="med" len="med"/>
-                      <a:tailEnd type="none" w="med" len="med"/>
-                    </a:lnL>
-                    <a:lnR w="25400" cap="flat" cmpd="sng" algn="ctr">
-                      <a:solidFill>
-                        <a:srgbClr val="FFFFFF"/>
-                      </a:solidFill>
-                      <a:prstDash val="solid"/>
-                      <a:round/>
-                      <a:headEnd type="none" w="med" len="med"/>
-                      <a:tailEnd type="none" w="med" len="med"/>
-                    </a:lnR>
-                    <a:lnT w="25400" cap="flat" cmpd="sng" algn="ctr">
-                      <a:solidFill>
-                        <a:srgbClr val="FFFFFF"/>
-                      </a:solidFill>
-                      <a:prstDash val="solid"/>
-                      <a:round/>
-                      <a:headEnd type="none" w="med" len="med"/>
-                      <a:tailEnd type="none" w="med" len="med"/>
-                    </a:lnT>
-                    <a:lnB w="25400" cap="flat" cmpd="sng" algn="ctr">
-                      <a:solidFill>
-                        <a:srgbClr val="FFFFFF"/>
-                      </a:solidFill>
-                      <a:prstDash val="solid"/>
-                      <a:round/>
-                      <a:headEnd type="none" w="med" len="med"/>
-                      <a:tailEnd type="none" w="med" len="med"/>
-                    </a:lnB>
-                    <a:solidFill>
-                      <a:srgbClr val="FBEAD2"/>
-                    </a:solidFill>
-                  </a:tcPr>
-                </a:tc>
-              </a:tr>
-              <a:tr h="475488">
-                <a:tc>
-                  <a:txBody>
-                    <a:bodyPr/>
-                    <a:lstStyle/>
-                    <a:p>
-                      <a:pPr indent="0" marL="0">
-                        <a:buNone/>
-                      </a:pPr>
-                      <a:r>
-                        <a:rPr lang="en-US" sz="1400" b="1" dirty="0">
-                          <a:solidFill>
-                            <a:srgbClr val="1E2A36"/>
-                          </a:solidFill>
-                          <a:latin typeface="Calibri" pitchFamily="34" charset="0"/>
-                          <a:ea typeface="Calibri" pitchFamily="34" charset="-122"/>
-                          <a:cs typeface="Calibri" pitchFamily="34" charset="-120"/>
-                        </a:rPr>
-                        <a:t>Schedule</a:t>
-                      </a:r>
-                      <a:endParaRPr lang="en-US" sz="1400" dirty="0">
-                        <a:latin typeface="Calibri" charset="0"/>
-                        <a:ea typeface="Calibri" charset="0"/>
-                        <a:cs typeface="Calibri" charset="0"/>
-                      </a:endParaRPr>
-                    </a:p>
-                  </a:txBody>
-                  <a:tcPr marL="114300" marR="114300" marT="38100" marB="38100" anchor="ctr">
-                    <a:lnL w="25400" cap="flat" cmpd="sng" algn="ctr">
-                      <a:solidFill>
-                        <a:srgbClr val="FFFFFF"/>
-                      </a:solidFill>
-                      <a:prstDash val="solid"/>
-                      <a:round/>
-                      <a:headEnd type="none" w="med" len="med"/>
-                      <a:tailEnd type="none" w="med" len="med"/>
-                    </a:lnL>
-                    <a:lnR w="25400" cap="flat" cmpd="sng" algn="ctr">
-                      <a:solidFill>
-                        <a:srgbClr val="FFFFFF"/>
-                      </a:solidFill>
-                      <a:prstDash val="solid"/>
-                      <a:round/>
-                      <a:headEnd type="none" w="med" len="med"/>
-                      <a:tailEnd type="none" w="med" len="med"/>
-                    </a:lnR>
-                    <a:lnT w="25400" cap="flat" cmpd="sng" algn="ctr">
-                      <a:solidFill>
-                        <a:srgbClr val="FFFFFF"/>
-                      </a:solidFill>
-                      <a:prstDash val="solid"/>
-                      <a:round/>
-                      <a:headEnd type="none" w="med" len="med"/>
-                      <a:tailEnd type="none" w="med" len="med"/>
-                    </a:lnT>
-                    <a:lnB w="25400" cap="flat" cmpd="sng" algn="ctr">
-                      <a:solidFill>
-                        <a:srgbClr val="FFFFFF"/>
-                      </a:solidFill>
-                      <a:prstDash val="solid"/>
-                      <a:round/>
-                      <a:headEnd type="none" w="med" len="med"/>
-                      <a:tailEnd type="none" w="med" len="med"/>
-                    </a:lnB>
-                    <a:solidFill>
-                      <a:srgbClr val="FFFFFF"/>
-                    </a:solidFill>
-                  </a:tcPr>
-                </a:tc>
-                <a:tc>
-                  <a:txBody>
-                    <a:bodyPr/>
-                    <a:lstStyle/>
-                    <a:p>
-                      <a:pPr algn="ctr" indent="0" marL="0">
-                        <a:buNone/>
-                      </a:pPr>
-                      <a:r>
-                        <a:rPr lang="en-US" sz="1400" b="1" dirty="0">
-                          <a:solidFill>
-                            <a:srgbClr val="5F7284"/>
-                          </a:solidFill>
-                          <a:latin typeface="Calibri" pitchFamily="34" charset="0"/>
-                          <a:ea typeface="Calibri" pitchFamily="34" charset="-122"/>
-                          <a:cs typeface="Calibri" pitchFamily="34" charset="-120"/>
-                        </a:rPr>
-                        <a:t>Med</a:t>
-                      </a:r>
-                      <a:endParaRPr lang="en-US" sz="1400" dirty="0">
-                        <a:latin typeface="Calibri" charset="0"/>
-                        <a:ea typeface="Calibri" charset="0"/>
-                        <a:cs typeface="Calibri" charset="0"/>
-                      </a:endParaRPr>
-                    </a:p>
-                  </a:txBody>
-                  <a:tcPr marL="114300" marR="114300" marT="38100" marB="38100" anchor="ctr">
-                    <a:lnL w="25400" cap="flat" cmpd="sng" algn="ctr">
-                      <a:solidFill>
-                        <a:srgbClr val="FFFFFF"/>
-                      </a:solidFill>
-                      <a:prstDash val="solid"/>
-                      <a:round/>
-                      <a:headEnd type="none" w="med" len="med"/>
-                      <a:tailEnd type="none" w="med" len="med"/>
-                    </a:lnL>
-                    <a:lnR w="25400" cap="flat" cmpd="sng" algn="ctr">
-                      <a:solidFill>
-                        <a:srgbClr val="FFFFFF"/>
-                      </a:solidFill>
-                      <a:prstDash val="solid"/>
-                      <a:round/>
-                      <a:headEnd type="none" w="med" len="med"/>
-                      <a:tailEnd type="none" w="med" len="med"/>
-                    </a:lnR>
-                    <a:lnT w="25400" cap="flat" cmpd="sng" algn="ctr">
-                      <a:solidFill>
-                        <a:srgbClr val="FFFFFF"/>
-                      </a:solidFill>
-                      <a:prstDash val="solid"/>
-                      <a:round/>
-                      <a:headEnd type="none" w="med" len="med"/>
-                      <a:tailEnd type="none" w="med" len="med"/>
-                    </a:lnT>
-                    <a:lnB w="25400" cap="flat" cmpd="sng" algn="ctr">
-                      <a:solidFill>
-                        <a:srgbClr val="FFFFFF"/>
-                      </a:solidFill>
-                      <a:prstDash val="solid"/>
-                      <a:round/>
-                      <a:headEnd type="none" w="med" len="med"/>
-                      <a:tailEnd type="none" w="med" len="med"/>
-                    </a:lnB>
-                    <a:solidFill>
-                      <a:srgbClr val="FFFFFF"/>
-                    </a:solidFill>
-                  </a:tcPr>
-                </a:tc>
-                <a:tc>
-                  <a:txBody>
-                    <a:bodyPr/>
-                    <a:lstStyle/>
-                    <a:p>
-                      <a:pPr indent="0" marL="0">
-                        <a:buNone/>
-                      </a:pPr>
-                      <a:r>
-                        <a:rPr lang="en-US" sz="1350" dirty="0">
-                          <a:solidFill>
-                            <a:srgbClr val="1E2A36"/>
-                          </a:solidFill>
-                          <a:latin typeface="Calibri" pitchFamily="34" charset="0"/>
-                          <a:ea typeface="Calibri" pitchFamily="34" charset="-122"/>
-                          <a:cs typeface="Calibri" pitchFamily="34" charset="-120"/>
-                        </a:rPr>
-                        <a:t>One course, add / see-position / claim — that slice fits</a:t>
-                      </a:r>
-                      <a:endParaRPr lang="en-US" sz="1350" dirty="0">
-                        <a:latin typeface="Calibri" charset="0"/>
-                        <a:ea typeface="Calibri" charset="0"/>
-                        <a:cs typeface="Calibri" charset="0"/>
-                      </a:endParaRPr>
-                    </a:p>
-                  </a:txBody>
-                  <a:tcPr marL="114300" marR="114300" marT="38100" marB="38100" anchor="ctr">
-                    <a:lnL w="25400" cap="flat" cmpd="sng" algn="ctr">
-                      <a:solidFill>
-                        <a:srgbClr val="FFFFFF"/>
-                      </a:solidFill>
-                      <a:prstDash val="solid"/>
-                      <a:round/>
-                      <a:headEnd type="none" w="med" len="med"/>
-                      <a:tailEnd type="none" w="med" len="med"/>
-                    </a:lnL>
-                    <a:lnR w="25400" cap="flat" cmpd="sng" algn="ctr">
-                      <a:solidFill>
-                        <a:srgbClr val="FFFFFF"/>
-                      </a:solidFill>
-                      <a:prstDash val="solid"/>
-                      <a:round/>
-                      <a:headEnd type="none" w="med" len="med"/>
-                      <a:tailEnd type="none" w="med" len="med"/>
-                    </a:lnR>
-                    <a:lnT w="25400" cap="flat" cmpd="sng" algn="ctr">
-                      <a:solidFill>
-                        <a:srgbClr val="FFFFFF"/>
-                      </a:solidFill>
-                      <a:prstDash val="solid"/>
-                      <a:round/>
-                      <a:headEnd type="none" w="med" len="med"/>
-                      <a:tailEnd type="none" w="med" len="med"/>
-                    </a:lnT>
-                    <a:lnB w="25400" cap="flat" cmpd="sng" algn="ctr">
-                      <a:solidFill>
-                        <a:srgbClr val="FFFFFF"/>
-                      </a:solidFill>
-                      <a:prstDash val="solid"/>
-                      <a:round/>
-                      <a:headEnd type="none" w="med" len="med"/>
-                      <a:tailEnd type="none" w="med" len="med"/>
-                    </a:lnB>
-                    <a:solidFill>
-                      <a:srgbClr val="FFFFFF"/>
-                    </a:solidFill>
-                  </a:tcPr>
-                </a:tc>
-              </a:tr>
-              <a:tr h="475488">
-                <a:tc>
-                  <a:txBody>
-                    <a:bodyPr/>
-                    <a:lstStyle/>
-                    <a:p>
-                      <a:pPr indent="0" marL="0">
-                        <a:buNone/>
-                      </a:pPr>
-                      <a:r>
-                        <a:rPr lang="en-US" sz="1400" b="1" dirty="0">
-                          <a:solidFill>
-                            <a:srgbClr val="1E2A36"/>
-                          </a:solidFill>
-                          <a:latin typeface="Calibri" pitchFamily="34" charset="0"/>
-                          <a:ea typeface="Calibri" pitchFamily="34" charset="-122"/>
-                          <a:cs typeface="Calibri" pitchFamily="34" charset="-120"/>
-                        </a:rPr>
-                        <a:t>Dependency</a:t>
-                      </a:r>
-                      <a:endParaRPr lang="en-US" sz="1400" dirty="0">
-                        <a:latin typeface="Calibri" charset="0"/>
-                        <a:ea typeface="Calibri" charset="0"/>
-                        <a:cs typeface="Calibri" charset="0"/>
-                      </a:endParaRPr>
-                    </a:p>
-                  </a:txBody>
-                  <a:tcPr marL="114300" marR="114300" marT="38100" marB="38100" anchor="ctr">
-                    <a:lnL w="25400" cap="flat" cmpd="sng" algn="ctr">
-                      <a:solidFill>
-                        <a:srgbClr val="FFFFFF"/>
-                      </a:solidFill>
-                      <a:prstDash val="solid"/>
-                      <a:round/>
-                      <a:headEnd type="none" w="med" len="med"/>
-                      <a:tailEnd type="none" w="med" len="med"/>
-                    </a:lnL>
-                    <a:lnR w="25400" cap="flat" cmpd="sng" algn="ctr">
-                      <a:solidFill>
-                        <a:srgbClr val="FFFFFF"/>
-                      </a:solidFill>
-                      <a:prstDash val="solid"/>
-                      <a:round/>
-                      <a:headEnd type="none" w="med" len="med"/>
-                      <a:tailEnd type="none" w="med" len="med"/>
-                    </a:lnR>
-                    <a:lnT w="25400" cap="flat" cmpd="sng" algn="ctr">
-                      <a:solidFill>
-                        <a:srgbClr val="FFFFFF"/>
-                      </a:solidFill>
-                      <a:prstDash val="solid"/>
-                      <a:round/>
-                      <a:headEnd type="none" w="med" len="med"/>
-                      <a:tailEnd type="none" w="med" len="med"/>
-                    </a:lnT>
-                    <a:lnB w="25400" cap="flat" cmpd="sng" algn="ctr">
-                      <a:solidFill>
-                        <a:srgbClr val="FFFFFF"/>
-                      </a:solidFill>
-                      <a:prstDash val="solid"/>
-                      <a:round/>
-                      <a:headEnd type="none" w="med" len="med"/>
-                      <a:tailEnd type="none" w="med" len="med"/>
-                    </a:lnB>
-                    <a:solidFill>
-                      <a:srgbClr val="FFFFFF"/>
-                    </a:solidFill>
-                  </a:tcPr>
-                </a:tc>
-                <a:tc>
-                  <a:txBody>
-                    <a:bodyPr/>
-                    <a:lstStyle/>
-                    <a:p>
-                      <a:pPr algn="ctr" indent="0" marL="0">
-                        <a:buNone/>
-                      </a:pPr>
-                      <a:r>
-                        <a:rPr lang="en-US" sz="1400" b="1" dirty="0">
-                          <a:solidFill>
-                            <a:srgbClr val="5F7284"/>
-                          </a:solidFill>
-                          <a:latin typeface="Calibri" pitchFamily="34" charset="0"/>
-                          <a:ea typeface="Calibri" pitchFamily="34" charset="-122"/>
-                          <a:cs typeface="Calibri" pitchFamily="34" charset="-120"/>
-                        </a:rPr>
-                        <a:t>Med</a:t>
-                      </a:r>
-                      <a:endParaRPr lang="en-US" sz="1400" dirty="0">
-                        <a:latin typeface="Calibri" charset="0"/>
-                        <a:ea typeface="Calibri" charset="0"/>
-                        <a:cs typeface="Calibri" charset="0"/>
-                      </a:endParaRPr>
-                    </a:p>
-                  </a:txBody>
-                  <a:tcPr marL="114300" marR="114300" marT="38100" marB="38100" anchor="ctr">
-                    <a:lnL w="25400" cap="flat" cmpd="sng" algn="ctr">
-                      <a:solidFill>
-                        <a:srgbClr val="FFFFFF"/>
-                      </a:solidFill>
-                      <a:prstDash val="solid"/>
-                      <a:round/>
-                      <a:headEnd type="none" w="med" len="med"/>
-                      <a:tailEnd type="none" w="med" len="med"/>
-                    </a:lnL>
-                    <a:lnR w="25400" cap="flat" cmpd="sng" algn="ctr">
-                      <a:solidFill>
-                        <a:srgbClr val="FFFFFF"/>
-                      </a:solidFill>
-                      <a:prstDash val="solid"/>
-                      <a:round/>
-                      <a:headEnd type="none" w="med" len="med"/>
-                      <a:tailEnd type="none" w="med" len="med"/>
-                    </a:lnR>
-                    <a:lnT w="25400" cap="flat" cmpd="sng" algn="ctr">
-                      <a:solidFill>
-                        <a:srgbClr val="FFFFFF"/>
-                      </a:solidFill>
-                      <a:prstDash val="solid"/>
-                      <a:round/>
-                      <a:headEnd type="none" w="med" len="med"/>
-                      <a:tailEnd type="none" w="med" len="med"/>
-                    </a:lnT>
-                    <a:lnB w="25400" cap="flat" cmpd="sng" algn="ctr">
-                      <a:solidFill>
-                        <a:srgbClr val="FFFFFF"/>
-                      </a:solidFill>
-                      <a:prstDash val="solid"/>
-                      <a:round/>
-                      <a:headEnd type="none" w="med" len="med"/>
-                      <a:tailEnd type="none" w="med" len="med"/>
-                    </a:lnB>
-                    <a:solidFill>
-                      <a:srgbClr val="FFFFFF"/>
-                    </a:solidFill>
-                  </a:tcPr>
-                </a:tc>
-                <a:tc>
-                  <a:txBody>
-                    <a:bodyPr/>
-                    <a:lstStyle/>
-                    <a:p>
-                      <a:pPr indent="0" marL="0">
-                        <a:buNone/>
-                      </a:pPr>
-                      <a:r>
-                        <a:rPr lang="en-US" sz="1350" dirty="0">
-                          <a:solidFill>
-                            <a:srgbClr val="1E2A36"/>
-                          </a:solidFill>
-                          <a:latin typeface="Calibri" pitchFamily="34" charset="0"/>
-                          <a:ea typeface="Calibri" pitchFamily="34" charset="-122"/>
-                          <a:cs typeface="Calibri" pitchFamily="34" charset="-120"/>
-                        </a:rPr>
-                        <a:t>Build WebSockets or lean on a managed service (rate limits?)</a:t>
-                      </a:r>
-                      <a:endParaRPr lang="en-US" sz="1350" dirty="0">
-                        <a:latin typeface="Calibri" charset="0"/>
-                        <a:ea typeface="Calibri" charset="0"/>
-                        <a:cs typeface="Calibri" charset="0"/>
-                      </a:endParaRPr>
-                    </a:p>
-                  </a:txBody>
-                  <a:tcPr marL="114300" marR="114300" marT="38100" marB="38100" anchor="ctr">
-                    <a:lnL w="25400" cap="flat" cmpd="sng" algn="ctr">
-                      <a:solidFill>
-                        <a:srgbClr val="FFFFFF"/>
-                      </a:solidFill>
-                      <a:prstDash val="solid"/>
-                      <a:round/>
-                      <a:headEnd type="none" w="med" len="med"/>
-                      <a:tailEnd type="none" w="med" len="med"/>
-                    </a:lnL>
-                    <a:lnR w="25400" cap="flat" cmpd="sng" algn="ctr">
-                      <a:solidFill>
-                        <a:srgbClr val="FFFFFF"/>
-                      </a:solidFill>
-                      <a:prstDash val="solid"/>
-                      <a:round/>
-                      <a:headEnd type="none" w="med" len="med"/>
-                      <a:tailEnd type="none" w="med" len="med"/>
-                    </a:lnR>
-                    <a:lnT w="25400" cap="flat" cmpd="sng" algn="ctr">
-                      <a:solidFill>
-                        <a:srgbClr val="FFFFFF"/>
-                      </a:solidFill>
-                      <a:prstDash val="solid"/>
-                      <a:round/>
-                      <a:headEnd type="none" w="med" len="med"/>
-                      <a:tailEnd type="none" w="med" len="med"/>
-                    </a:lnT>
-                    <a:lnB w="25400" cap="flat" cmpd="sng" algn="ctr">
-                      <a:solidFill>
-                        <a:srgbClr val="FFFFFF"/>
-                      </a:solidFill>
-                      <a:prstDash val="solid"/>
-                      <a:round/>
-                      <a:headEnd type="none" w="med" len="med"/>
-                      <a:tailEnd type="none" w="med" len="med"/>
-                    </a:lnB>
-                    <a:solidFill>
-                      <a:srgbClr val="FFFFFF"/>
-                    </a:solidFill>
-                  </a:tcPr>
-                </a:tc>
-              </a:tr>
-              <a:tr h="475488">
-                <a:tc>
-                  <a:txBody>
-                    <a:bodyPr/>
-                    <a:lstStyle/>
-                    <a:p>
-                      <a:pPr indent="0" marL="0">
-                        <a:buNone/>
-                      </a:pPr>
-                      <a:r>
-                        <a:rPr lang="en-US" sz="1400" b="1" dirty="0">
-                          <a:solidFill>
-                            <a:srgbClr val="1E2A36"/>
-                          </a:solidFill>
-                          <a:latin typeface="Calibri" pitchFamily="34" charset="0"/>
-                          <a:ea typeface="Calibri" pitchFamily="34" charset="-122"/>
-                          <a:cs typeface="Calibri" pitchFamily="34" charset="-120"/>
-                        </a:rPr>
-                        <a:t>Skill</a:t>
-                      </a:r>
-                      <a:endParaRPr lang="en-US" sz="1400" dirty="0">
-                        <a:latin typeface="Calibri" charset="0"/>
-                        <a:ea typeface="Calibri" charset="0"/>
-                        <a:cs typeface="Calibri" charset="0"/>
-                      </a:endParaRPr>
-                    </a:p>
-                  </a:txBody>
-                  <a:tcPr marL="114300" marR="114300" marT="38100" marB="38100" anchor="ctr">
-                    <a:lnL w="25400" cap="flat" cmpd="sng" algn="ctr">
-                      <a:solidFill>
-                        <a:srgbClr val="FFFFFF"/>
-                      </a:solidFill>
-                      <a:prstDash val="solid"/>
-                      <a:round/>
-                      <a:headEnd type="none" w="med" len="med"/>
-                      <a:tailEnd type="none" w="med" len="med"/>
-                    </a:lnL>
-                    <a:lnR w="25400" cap="flat" cmpd="sng" algn="ctr">
-                      <a:solidFill>
-                        <a:srgbClr val="FFFFFF"/>
-                      </a:solidFill>
-                      <a:prstDash val="solid"/>
-                      <a:round/>
-                      <a:headEnd type="none" w="med" len="med"/>
-                      <a:tailEnd type="none" w="med" len="med"/>
-                    </a:lnR>
-                    <a:lnT w="25400" cap="flat" cmpd="sng" algn="ctr">
-                      <a:solidFill>
-                        <a:srgbClr val="FFFFFF"/>
-                      </a:solidFill>
-                      <a:prstDash val="solid"/>
-                      <a:round/>
-                      <a:headEnd type="none" w="med" len="med"/>
-                      <a:tailEnd type="none" w="med" len="med"/>
-                    </a:lnT>
-                    <a:lnB w="25400" cap="flat" cmpd="sng" algn="ctr">
-                      <a:solidFill>
-                        <a:srgbClr val="FFFFFF"/>
-                      </a:solidFill>
-                      <a:prstDash val="solid"/>
-                      <a:round/>
-                      <a:headEnd type="none" w="med" len="med"/>
-                      <a:tailEnd type="none" w="med" len="med"/>
-                    </a:lnB>
-                    <a:solidFill>
-                      <a:srgbClr val="FBEAD2"/>
-                    </a:solidFill>
-                  </a:tcPr>
-                </a:tc>
-                <a:tc>
-                  <a:txBody>
-                    <a:bodyPr/>
-                    <a:lstStyle/>
-                    <a:p>
-                      <a:pPr algn="ctr" indent="0" marL="0">
-                        <a:buNone/>
-                      </a:pPr>
-                      <a:r>
-                        <a:rPr lang="en-US" sz="1400" b="1" dirty="0">
-                          <a:solidFill>
-                            <a:srgbClr val="D9614C"/>
-                          </a:solidFill>
-                          <a:latin typeface="Calibri" pitchFamily="34" charset="0"/>
-                          <a:ea typeface="Calibri" pitchFamily="34" charset="-122"/>
-                          <a:cs typeface="Calibri" pitchFamily="34" charset="-120"/>
-                        </a:rPr>
-                        <a:t>High</a:t>
-                      </a:r>
-                      <a:endParaRPr lang="en-US" sz="1400" dirty="0">
-                        <a:latin typeface="Calibri" charset="0"/>
-                        <a:ea typeface="Calibri" charset="0"/>
-                        <a:cs typeface="Calibri" charset="0"/>
-                      </a:endParaRPr>
-                    </a:p>
-                  </a:txBody>
-                  <a:tcPr marL="114300" marR="114300" marT="38100" marB="38100" anchor="ctr">
-                    <a:lnL w="25400" cap="flat" cmpd="sng" algn="ctr">
-                      <a:solidFill>
-                        <a:srgbClr val="FFFFFF"/>
-                      </a:solidFill>
-                      <a:prstDash val="solid"/>
-                      <a:round/>
-                      <a:headEnd type="none" w="med" len="med"/>
-                      <a:tailEnd type="none" w="med" len="med"/>
-                    </a:lnL>
-                    <a:lnR w="25400" cap="flat" cmpd="sng" algn="ctr">
-                      <a:solidFill>
-                        <a:srgbClr val="FFFFFF"/>
-                      </a:solidFill>
-                      <a:prstDash val="solid"/>
-                      <a:round/>
-                      <a:headEnd type="none" w="med" len="med"/>
-                      <a:tailEnd type="none" w="med" len="med"/>
-                    </a:lnR>
-                    <a:lnT w="25400" cap="flat" cmpd="sng" algn="ctr">
-                      <a:solidFill>
-                        <a:srgbClr val="FFFFFF"/>
-                      </a:solidFill>
-                      <a:prstDash val="solid"/>
-                      <a:round/>
-                      <a:headEnd type="none" w="med" len="med"/>
-                      <a:tailEnd type="none" w="med" len="med"/>
-                    </a:lnT>
-                    <a:lnB w="25400" cap="flat" cmpd="sng" algn="ctr">
-                      <a:solidFill>
-                        <a:srgbClr val="FFFFFF"/>
-                      </a:solidFill>
-                      <a:prstDash val="solid"/>
-                      <a:round/>
-                      <a:headEnd type="none" w="med" len="med"/>
-                      <a:tailEnd type="none" w="med" len="med"/>
-                    </a:lnB>
-                    <a:solidFill>
-                      <a:srgbClr val="FBEAD2"/>
-                    </a:solidFill>
-                  </a:tcPr>
-                </a:tc>
-                <a:tc>
-                  <a:txBody>
-                    <a:bodyPr/>
-                    <a:lstStyle/>
-                    <a:p>
-                      <a:pPr indent="0" marL="0">
-                        <a:buNone/>
-                      </a:pPr>
-                      <a:r>
-                        <a:rPr lang="en-US" sz="1350" dirty="0">
-                          <a:solidFill>
-                            <a:srgbClr val="1E2A36"/>
-                          </a:solidFill>
-                          <a:latin typeface="Calibri" pitchFamily="34" charset="0"/>
-                          <a:ea typeface="Calibri" pitchFamily="34" charset="-122"/>
-                          <a:cs typeface="Calibri" pitchFamily="34" charset="-120"/>
-                        </a:rPr>
-                        <a:t>Built request/response apps, never real-time — same root as Technical</a:t>
-                      </a:r>
-                      <a:endParaRPr lang="en-US" sz="1350" dirty="0">
-                        <a:latin typeface="Calibri" charset="0"/>
-                        <a:ea typeface="Calibri" charset="0"/>
-                        <a:cs typeface="Calibri" charset="0"/>
-                      </a:endParaRPr>
-                    </a:p>
-                  </a:txBody>
-                  <a:tcPr marL="114300" marR="114300" marT="38100" marB="38100" anchor="ctr">
-                    <a:lnL w="25400" cap="flat" cmpd="sng" algn="ctr">
-                      <a:solidFill>
-                        <a:srgbClr val="FFFFFF"/>
-                      </a:solidFill>
-                      <a:prstDash val="solid"/>
-                      <a:round/>
-                      <a:headEnd type="none" w="med" len="med"/>
-                      <a:tailEnd type="none" w="med" len="med"/>
-                    </a:lnL>
-                    <a:lnR w="25400" cap="flat" cmpd="sng" algn="ctr">
-                      <a:solidFill>
-                        <a:srgbClr val="FFFFFF"/>
-                      </a:solidFill>
-                      <a:prstDash val="solid"/>
-                      <a:round/>
-                      <a:headEnd type="none" w="med" len="med"/>
-                      <a:tailEnd type="none" w="med" len="med"/>
-                    </a:lnR>
-                    <a:lnT w="25400" cap="flat" cmpd="sng" algn="ctr">
-                      <a:solidFill>
-                        <a:srgbClr val="FFFFFF"/>
-                      </a:solidFill>
-                      <a:prstDash val="solid"/>
-                      <a:round/>
-                      <a:headEnd type="none" w="med" len="med"/>
-                      <a:tailEnd type="none" w="med" len="med"/>
-                    </a:lnT>
-                    <a:lnB w="25400" cap="flat" cmpd="sng" algn="ctr">
-                      <a:solidFill>
-                        <a:srgbClr val="FFFFFF"/>
-                      </a:solidFill>
-                      <a:prstDash val="solid"/>
-                      <a:round/>
-                      <a:headEnd type="none" w="med" len="med"/>
-                      <a:tailEnd type="none" w="med" len="med"/>
-                    </a:lnB>
-                    <a:solidFill>
-                      <a:srgbClr val="FBEAD2"/>
-                    </a:solidFill>
-                  </a:tcPr>
-                </a:tc>
-              </a:tr>
-              <a:tr h="475488">
-                <a:tc>
-                  <a:txBody>
-                    <a:bodyPr/>
-                    <a:lstStyle/>
-                    <a:p>
-                      <a:pPr indent="0" marL="0">
-                        <a:buNone/>
-                      </a:pPr>
-                      <a:r>
-                        <a:rPr lang="en-US" sz="1400" b="1" dirty="0">
-                          <a:solidFill>
-                            <a:srgbClr val="1E2A36"/>
-                          </a:solidFill>
-                          <a:latin typeface="Calibri" pitchFamily="34" charset="0"/>
-                          <a:ea typeface="Calibri" pitchFamily="34" charset="-122"/>
-                          <a:cs typeface="Calibri" pitchFamily="34" charset="-120"/>
-                        </a:rPr>
-                        <a:t>Adoption</a:t>
-                      </a:r>
-                      <a:endParaRPr lang="en-US" sz="1400" dirty="0">
-                        <a:latin typeface="Calibri" charset="0"/>
-                        <a:ea typeface="Calibri" charset="0"/>
-                        <a:cs typeface="Calibri" charset="0"/>
-                      </a:endParaRPr>
-                    </a:p>
-                  </a:txBody>
-                  <a:tcPr marL="114300" marR="114300" marT="38100" marB="38100" anchor="ctr">
-                    <a:lnL w="25400" cap="flat" cmpd="sng" algn="ctr">
-                      <a:solidFill>
-                        <a:srgbClr val="FFFFFF"/>
-                      </a:solidFill>
-                      <a:prstDash val="solid"/>
-                      <a:round/>
-                      <a:headEnd type="none" w="med" len="med"/>
-                      <a:tailEnd type="none" w="med" len="med"/>
-                    </a:lnL>
-                    <a:lnR w="25400" cap="flat" cmpd="sng" algn="ctr">
-                      <a:solidFill>
-                        <a:srgbClr val="FFFFFF"/>
-                      </a:solidFill>
-                      <a:prstDash val="solid"/>
-                      <a:round/>
-                      <a:headEnd type="none" w="med" len="med"/>
-                      <a:tailEnd type="none" w="med" len="med"/>
-                    </a:lnR>
-                    <a:lnT w="25400" cap="flat" cmpd="sng" algn="ctr">
-                      <a:solidFill>
-                        <a:srgbClr val="FFFFFF"/>
-                      </a:solidFill>
-                      <a:prstDash val="solid"/>
-                      <a:round/>
-                      <a:headEnd type="none" w="med" len="med"/>
-                      <a:tailEnd type="none" w="med" len="med"/>
-                    </a:lnT>
-                    <a:lnB w="25400" cap="flat" cmpd="sng" algn="ctr">
-                      <a:solidFill>
-                        <a:srgbClr val="FFFFFF"/>
-                      </a:solidFill>
-                      <a:prstDash val="solid"/>
-                      <a:round/>
-                      <a:headEnd type="none" w="med" len="med"/>
-                      <a:tailEnd type="none" w="med" len="med"/>
-                    </a:lnB>
-                    <a:solidFill>
-                      <a:srgbClr val="FFFFFF"/>
-                    </a:solidFill>
-                  </a:tcPr>
-                </a:tc>
-                <a:tc>
-                  <a:txBody>
-                    <a:bodyPr/>
-                    <a:lstStyle/>
-                    <a:p>
-                      <a:pPr algn="ctr" indent="0" marL="0">
-                        <a:buNone/>
-                      </a:pPr>
-                      <a:r>
-                        <a:rPr lang="en-US" sz="1400" b="1" dirty="0">
-                          <a:solidFill>
-                            <a:srgbClr val="5F7284"/>
-                          </a:solidFill>
-                          <a:latin typeface="Calibri" pitchFamily="34" charset="0"/>
-                          <a:ea typeface="Calibri" pitchFamily="34" charset="-122"/>
-                          <a:cs typeface="Calibri" pitchFamily="34" charset="-120"/>
-                        </a:rPr>
-                        <a:t>Med</a:t>
-                      </a:r>
-                      <a:endParaRPr lang="en-US" sz="1400" dirty="0">
-                        <a:latin typeface="Calibri" charset="0"/>
-                        <a:ea typeface="Calibri" charset="0"/>
-                        <a:cs typeface="Calibri" charset="0"/>
-                      </a:endParaRPr>
-                    </a:p>
-                  </a:txBody>
-                  <a:tcPr marL="114300" marR="114300" marT="38100" marB="38100" anchor="ctr">
-                    <a:lnL w="25400" cap="flat" cmpd="sng" algn="ctr">
-                      <a:solidFill>
-                        <a:srgbClr val="FFFFFF"/>
-                      </a:solidFill>
-                      <a:prstDash val="solid"/>
-                      <a:round/>
-                      <a:headEnd type="none" w="med" len="med"/>
-                      <a:tailEnd type="none" w="med" len="med"/>
-                    </a:lnL>
-                    <a:lnR w="25400" cap="flat" cmpd="sng" algn="ctr">
-                      <a:solidFill>
-                        <a:srgbClr val="FFFFFF"/>
-                      </a:solidFill>
-                      <a:prstDash val="solid"/>
-                      <a:round/>
-                      <a:headEnd type="none" w="med" len="med"/>
-                      <a:tailEnd type="none" w="med" len="med"/>
-                    </a:lnR>
-                    <a:lnT w="25400" cap="flat" cmpd="sng" algn="ctr">
-                      <a:solidFill>
-                        <a:srgbClr val="FFFFFF"/>
-                      </a:solidFill>
-                      <a:prstDash val="solid"/>
-                      <a:round/>
-                      <a:headEnd type="none" w="med" len="med"/>
-                      <a:tailEnd type="none" w="med" len="med"/>
-                    </a:lnT>
-                    <a:lnB w="25400" cap="flat" cmpd="sng" algn="ctr">
-                      <a:solidFill>
-                        <a:srgbClr val="FFFFFF"/>
-                      </a:solidFill>
-                      <a:prstDash val="solid"/>
-                      <a:round/>
-                      <a:headEnd type="none" w="med" len="med"/>
-                      <a:tailEnd type="none" w="med" len="med"/>
-                    </a:lnB>
-                    <a:solidFill>
-                      <a:srgbClr val="FFFFFF"/>
-                    </a:solidFill>
-                  </a:tcPr>
-                </a:tc>
-                <a:tc>
-                  <a:txBody>
-                    <a:bodyPr/>
-                    <a:lstStyle/>
-                    <a:p>
-                      <a:pPr indent="0" marL="0">
-                        <a:buNone/>
-                      </a:pPr>
-                      <a:r>
-                        <a:rPr lang="en-US" sz="1350" dirty="0">
-                          <a:solidFill>
-                            <a:srgbClr val="1E2A36"/>
-                          </a:solidFill>
-                          <a:latin typeface="Calibri" pitchFamily="34" charset="0"/>
-                          <a:ea typeface="Calibri" pitchFamily="34" charset="-122"/>
-                          <a:cs typeface="Calibri" pitchFamily="34" charset="-120"/>
-                        </a:rPr>
-                        <a:t>Will students open an app vs. just walk in?</a:t>
-                      </a:r>
-                      <a:endParaRPr lang="en-US" sz="1350" dirty="0">
-                        <a:latin typeface="Calibri" charset="0"/>
-                        <a:ea typeface="Calibri" charset="0"/>
-                        <a:cs typeface="Calibri" charset="0"/>
-                      </a:endParaRPr>
-                    </a:p>
-                  </a:txBody>
-                  <a:tcPr marL="114300" marR="114300" marT="38100" marB="38100" anchor="ctr">
-                    <a:lnL w="25400" cap="flat" cmpd="sng" algn="ctr">
-                      <a:solidFill>
-                        <a:srgbClr val="FFFFFF"/>
-                      </a:solidFill>
-                      <a:prstDash val="solid"/>
-                      <a:round/>
-                      <a:headEnd type="none" w="med" len="med"/>
-                      <a:tailEnd type="none" w="med" len="med"/>
-                    </a:lnL>
-                    <a:lnR w="25400" cap="flat" cmpd="sng" algn="ctr">
-                      <a:solidFill>
-                        <a:srgbClr val="FFFFFF"/>
-                      </a:solidFill>
-                      <a:prstDash val="solid"/>
-                      <a:round/>
-                      <a:headEnd type="none" w="med" len="med"/>
-                      <a:tailEnd type="none" w="med" len="med"/>
-                    </a:lnR>
-                    <a:lnT w="25400" cap="flat" cmpd="sng" algn="ctr">
-                      <a:solidFill>
-                        <a:srgbClr val="FFFFFF"/>
-                      </a:solidFill>
-                      <a:prstDash val="solid"/>
-                      <a:round/>
-                      <a:headEnd type="none" w="med" len="med"/>
-                      <a:tailEnd type="none" w="med" len="med"/>
-                    </a:lnT>
-                    <a:lnB w="25400" cap="flat" cmpd="sng" algn="ctr">
-                      <a:solidFill>
-                        <a:srgbClr val="FFFFFF"/>
-                      </a:solidFill>
-                      <a:prstDash val="solid"/>
-                      <a:round/>
-                      <a:headEnd type="none" w="med" len="med"/>
-                      <a:tailEnd type="none" w="med" len="med"/>
-                    </a:lnB>
-                    <a:solidFill>
-                      <a:srgbClr val="FFFFFF"/>
-                    </a:solidFill>
-                  </a:tcPr>
-                </a:tc>
-              </a:tr>
-              <a:tr h="475488">
-                <a:tc>
-                  <a:txBody>
-                    <a:bodyPr/>
-                    <a:lstStyle/>
-                    <a:p>
-                      <a:pPr indent="0" marL="0">
-                        <a:buNone/>
-                      </a:pPr>
-                      <a:r>
-                        <a:rPr lang="en-US" sz="1400" b="1" dirty="0">
-                          <a:solidFill>
-                            <a:srgbClr val="1E2A36"/>
-                          </a:solidFill>
-                          <a:latin typeface="Calibri" pitchFamily="34" charset="0"/>
-                          <a:ea typeface="Calibri" pitchFamily="34" charset="-122"/>
-                          <a:cs typeface="Calibri" pitchFamily="34" charset="-120"/>
-                        </a:rPr>
-                        <a:t>Maintenance</a:t>
-                      </a:r>
-                      <a:endParaRPr lang="en-US" sz="1400" dirty="0">
-                        <a:latin typeface="Calibri" charset="0"/>
-                        <a:ea typeface="Calibri" charset="0"/>
-                        <a:cs typeface="Calibri" charset="0"/>
-                      </a:endParaRPr>
-                    </a:p>
-                  </a:txBody>
-                  <a:tcPr marL="114300" marR="114300" marT="38100" marB="38100" anchor="ctr">
-                    <a:lnL w="25400" cap="flat" cmpd="sng" algn="ctr">
-                      <a:solidFill>
-                        <a:srgbClr val="FFFFFF"/>
-                      </a:solidFill>
-                      <a:prstDash val="solid"/>
-                      <a:round/>
-                      <a:headEnd type="none" w="med" len="med"/>
-                      <a:tailEnd type="none" w="med" len="med"/>
-                    </a:lnL>
-                    <a:lnR w="25400" cap="flat" cmpd="sng" algn="ctr">
-                      <a:solidFill>
-                        <a:srgbClr val="FFFFFF"/>
-                      </a:solidFill>
-                      <a:prstDash val="solid"/>
-                      <a:round/>
-                      <a:headEnd type="none" w="med" len="med"/>
-                      <a:tailEnd type="none" w="med" len="med"/>
-                    </a:lnR>
-                    <a:lnT w="25400" cap="flat" cmpd="sng" algn="ctr">
-                      <a:solidFill>
-                        <a:srgbClr val="FFFFFF"/>
-                      </a:solidFill>
-                      <a:prstDash val="solid"/>
-                      <a:round/>
-                      <a:headEnd type="none" w="med" len="med"/>
-                      <a:tailEnd type="none" w="med" len="med"/>
-                    </a:lnT>
-                    <a:lnB w="25400" cap="flat" cmpd="sng" algn="ctr">
-                      <a:solidFill>
-                        <a:srgbClr val="FFFFFF"/>
-                      </a:solidFill>
-                      <a:prstDash val="solid"/>
-                      <a:round/>
-                      <a:headEnd type="none" w="med" len="med"/>
-                      <a:tailEnd type="none" w="med" len="med"/>
-                    </a:lnB>
-                    <a:solidFill>
-                      <a:srgbClr val="FFFFFF"/>
-                    </a:solidFill>
-                  </a:tcPr>
-                </a:tc>
-                <a:tc>
-                  <a:txBody>
-                    <a:bodyPr/>
-                    <a:lstStyle/>
-                    <a:p>
-                      <a:pPr algn="ctr" indent="0" marL="0">
-                        <a:buNone/>
-                      </a:pPr>
-                      <a:r>
-                        <a:rPr lang="en-US" sz="1400" b="1" dirty="0">
-                          <a:solidFill>
-                            <a:srgbClr val="5F7284"/>
-                          </a:solidFill>
-                          <a:latin typeface="Calibri" pitchFamily="34" charset="0"/>
-                          <a:ea typeface="Calibri" pitchFamily="34" charset="-122"/>
-                          <a:cs typeface="Calibri" pitchFamily="34" charset="-120"/>
-                        </a:rPr>
-                        <a:t>Med</a:t>
-                      </a:r>
-                      <a:endParaRPr lang="en-US" sz="1400" dirty="0">
-                        <a:latin typeface="Calibri" charset="0"/>
-                        <a:ea typeface="Calibri" charset="0"/>
-                        <a:cs typeface="Calibri" charset="0"/>
-                      </a:endParaRPr>
-                    </a:p>
-                  </a:txBody>
-                  <a:tcPr marL="114300" marR="114300" marT="38100" marB="38100" anchor="ctr">
-                    <a:lnL w="25400" cap="flat" cmpd="sng" algn="ctr">
-                      <a:solidFill>
-                        <a:srgbClr val="FFFFFF"/>
-                      </a:solidFill>
-                      <a:prstDash val="solid"/>
-                      <a:round/>
-                      <a:headEnd type="none" w="med" len="med"/>
-                      <a:tailEnd type="none" w="med" len="med"/>
-                    </a:lnL>
-                    <a:lnR w="25400" cap="flat" cmpd="sng" algn="ctr">
-                      <a:solidFill>
-                        <a:srgbClr val="FFFFFF"/>
-                      </a:solidFill>
-                      <a:prstDash val="solid"/>
-                      <a:round/>
-                      <a:headEnd type="none" w="med" len="med"/>
-                      <a:tailEnd type="none" w="med" len="med"/>
-                    </a:lnR>
-                    <a:lnT w="25400" cap="flat" cmpd="sng" algn="ctr">
-                      <a:solidFill>
-                        <a:srgbClr val="FFFFFF"/>
-                      </a:solidFill>
-                      <a:prstDash val="solid"/>
-                      <a:round/>
-                      <a:headEnd type="none" w="med" len="med"/>
-                      <a:tailEnd type="none" w="med" len="med"/>
-                    </a:lnT>
-                    <a:lnB w="25400" cap="flat" cmpd="sng" algn="ctr">
-                      <a:solidFill>
-                        <a:srgbClr val="FFFFFF"/>
-                      </a:solidFill>
-                      <a:prstDash val="solid"/>
-                      <a:round/>
-                      <a:headEnd type="none" w="med" len="med"/>
-                      <a:tailEnd type="none" w="med" len="med"/>
-                    </a:lnB>
-                    <a:solidFill>
-                      <a:srgbClr val="FFFFFF"/>
-                    </a:solidFill>
-                  </a:tcPr>
-                </a:tc>
-                <a:tc>
-                  <a:txBody>
-                    <a:bodyPr/>
-                    <a:lstStyle/>
-                    <a:p>
-                      <a:pPr indent="0" marL="0">
-                        <a:buNone/>
-                      </a:pPr>
-                      <a:r>
-                        <a:rPr lang="en-US" sz="1350" dirty="0">
-                          <a:solidFill>
-                            <a:srgbClr val="1E2A36"/>
-                          </a:solidFill>
-                          <a:latin typeface="Calibri" pitchFamily="34" charset="0"/>
-                          <a:ea typeface="Calibri" pitchFamily="34" charset="-122"/>
-                          <a:cs typeface="Calibri" pitchFamily="34" charset="-120"/>
-                        </a:rPr>
-                        <a:t>Runs live every session; a crash is very visible</a:t>
-                      </a:r>
-                      <a:endParaRPr lang="en-US" sz="1350" dirty="0">
-                        <a:latin typeface="Calibri" charset="0"/>
-                        <a:ea typeface="Calibri" charset="0"/>
-                        <a:cs typeface="Calibri" charset="0"/>
-                      </a:endParaRPr>
-                    </a:p>
-                  </a:txBody>
-                  <a:tcPr marL="114300" marR="114300" marT="38100" marB="38100" anchor="ctr">
-                    <a:lnL w="25400" cap="flat" cmpd="sng" algn="ctr">
-                      <a:solidFill>
-                        <a:srgbClr val="FFFFFF"/>
-                      </a:solidFill>
-                      <a:prstDash val="solid"/>
-                      <a:round/>
-                      <a:headEnd type="none" w="med" len="med"/>
-                      <a:tailEnd type="none" w="med" len="med"/>
-                    </a:lnL>
-                    <a:lnR w="25400" cap="flat" cmpd="sng" algn="ctr">
-                      <a:solidFill>
-                        <a:srgbClr val="FFFFFF"/>
-                      </a:solidFill>
-                      <a:prstDash val="solid"/>
-                      <a:round/>
-                      <a:headEnd type="none" w="med" len="med"/>
-                      <a:tailEnd type="none" w="med" len="med"/>
-                    </a:lnR>
-                    <a:lnT w="25400" cap="flat" cmpd="sng" algn="ctr">
-                      <a:solidFill>
-                        <a:srgbClr val="FFFFFF"/>
-                      </a:solidFill>
-                      <a:prstDash val="solid"/>
-                      <a:round/>
-                      <a:headEnd type="none" w="med" len="med"/>
-                      <a:tailEnd type="none" w="med" len="med"/>
-                    </a:lnT>
-                    <a:lnB w="25400" cap="flat" cmpd="sng" algn="ctr">
-                      <a:solidFill>
-                        <a:srgbClr val="FFFFFF"/>
-                      </a:solidFill>
-                      <a:prstDash val="solid"/>
-                      <a:round/>
-                      <a:headEnd type="none" w="med" len="med"/>
-                      <a:tailEnd type="none" w="med" len="med"/>
-                    </a:lnB>
-                    <a:solidFill>
-                      <a:srgbClr val="FFFFFF"/>
-                    </a:solidFill>
-                  </a:tcPr>
-                </a:tc>
-              </a:tr>
-            </a:tbl>
-          </a:graphicData>
-        </a:graphic>
-      </p:graphicFrame>
-      <p:sp>
-        <p:nvSpPr>
-          <p:cNvPr id="7" name="Shape 4"/>
-          <p:cNvSpPr/>
-          <p:nvPr/>
-        </p:nvSpPr>
-        <p:spPr>
-          <a:xfrm>
-            <a:off x="548640" y="5285232"/>
-            <a:ext cx="11064240" cy="896112"/>
+      <p:sp>
+        <p:nvSpPr>
+          <p:cNvPr id="6" name="Shape 4"/>
+          <p:cNvSpPr/>
+          <p:nvPr/>
+        </p:nvSpPr>
+        <p:spPr>
+          <a:xfrm>
+            <a:off x="548640" y="1938528"/>
+            <a:ext cx="11064240" cy="457200"/>
+          </a:xfrm>
+          <a:prstGeom prst="rect">
+            <a:avLst/>
+          </a:prstGeom>
+          <a:solidFill>
+            <a:srgbClr val="14233A"/>
+          </a:solidFill>
+          <a:ln/>
+        </p:spPr>
+      </p:sp>
+      <p:sp>
+        <p:nvSpPr>
+          <p:cNvPr id="7" name="Text 5"/>
+          <p:cNvSpPr/>
+          <p:nvPr/>
+        </p:nvSpPr>
+        <p:spPr>
+          <a:xfrm>
+            <a:off x="658368" y="1938528"/>
+            <a:ext cx="2066544" cy="457200"/>
+          </a:xfrm>
+          <a:prstGeom prst="rect">
+            <a:avLst/>
+          </a:prstGeom>
+          <a:noFill/>
+          <a:ln/>
+        </p:spPr>
+        <p:txBody>
+          <a:bodyPr wrap="square" lIns="0" tIns="0" rIns="0" bIns="0" rtlCol="0" anchor="ctr"/>
+          <a:lstStyle/>
+          <a:p>
+            <a:pPr indent="0" marL="0">
+              <a:buNone/>
+            </a:pPr>
+            <a:r>
+              <a:rPr lang="en-US" sz="1400" b="1" dirty="0">
+                <a:solidFill>
+                  <a:srgbClr val="FFFFFF"/>
+                </a:solidFill>
+                <a:latin typeface="Calibri" pitchFamily="34" charset="0"/>
+                <a:ea typeface="Calibri" pitchFamily="34" charset="-122"/>
+                <a:cs typeface="Calibri" pitchFamily="34" charset="-120"/>
+              </a:rPr>
+              <a:t>Category</a:t>
+            </a:r>
+            <a:endParaRPr lang="en-US" sz="1400" dirty="0"/>
+          </a:p>
+        </p:txBody>
+      </p:sp>
+      <p:sp>
+        <p:nvSpPr>
+          <p:cNvPr id="8" name="Text 6"/>
+          <p:cNvSpPr/>
+          <p:nvPr/>
+        </p:nvSpPr>
+        <p:spPr>
+          <a:xfrm>
+            <a:off x="2834640" y="1938528"/>
+            <a:ext cx="1188720" cy="457200"/>
+          </a:xfrm>
+          <a:prstGeom prst="rect">
+            <a:avLst/>
+          </a:prstGeom>
+          <a:noFill/>
+          <a:ln/>
+        </p:spPr>
+        <p:txBody>
+          <a:bodyPr wrap="square" lIns="0" tIns="0" rIns="0" bIns="0" rtlCol="0" anchor="ctr"/>
+          <a:lstStyle/>
+          <a:p>
+            <a:pPr algn="ctr" indent="0" marL="0">
+              <a:buNone/>
+            </a:pPr>
+            <a:r>
+              <a:rPr lang="en-US" sz="1400" b="1" dirty="0">
+                <a:solidFill>
+                  <a:srgbClr val="FFFFFF"/>
+                </a:solidFill>
+                <a:latin typeface="Calibri" pitchFamily="34" charset="0"/>
+                <a:ea typeface="Calibri" pitchFamily="34" charset="-122"/>
+                <a:cs typeface="Calibri" pitchFamily="34" charset="-120"/>
+              </a:rPr>
+              <a:t>Read</a:t>
+            </a:r>
+            <a:endParaRPr lang="en-US" sz="1400" dirty="0"/>
+          </a:p>
+        </p:txBody>
+      </p:sp>
+      <p:sp>
+        <p:nvSpPr>
+          <p:cNvPr id="9" name="Text 7"/>
+          <p:cNvSpPr/>
+          <p:nvPr/>
+        </p:nvSpPr>
+        <p:spPr>
+          <a:xfrm>
+            <a:off x="4133088" y="1938528"/>
+            <a:ext cx="7370064" cy="457200"/>
+          </a:xfrm>
+          <a:prstGeom prst="rect">
+            <a:avLst/>
+          </a:prstGeom>
+          <a:noFill/>
+          <a:ln/>
+        </p:spPr>
+        <p:txBody>
+          <a:bodyPr wrap="square" lIns="0" tIns="0" rIns="0" bIns="0" rtlCol="0" anchor="ctr"/>
+          <a:lstStyle/>
+          <a:p>
+            <a:pPr indent="0" marL="0">
+              <a:buNone/>
+            </a:pPr>
+            <a:r>
+              <a:rPr lang="en-US" sz="1400" b="1" dirty="0">
+                <a:solidFill>
+                  <a:srgbClr val="FFFFFF"/>
+                </a:solidFill>
+                <a:latin typeface="Calibri" pitchFamily="34" charset="0"/>
+                <a:ea typeface="Calibri" pitchFamily="34" charset="-122"/>
+                <a:cs typeface="Calibri" pitchFamily="34" charset="-120"/>
+              </a:rPr>
+              <a:t>Why</a:t>
+            </a:r>
+            <a:endParaRPr lang="en-US" sz="1400" dirty="0"/>
+          </a:p>
+        </p:txBody>
+      </p:sp>
+      <p:sp>
+        <p:nvSpPr>
+          <p:cNvPr id="10" name="Shape 8"/>
+          <p:cNvSpPr/>
+          <p:nvPr/>
+        </p:nvSpPr>
+        <p:spPr>
+          <a:xfrm>
+            <a:off x="548640" y="2450592"/>
+            <a:ext cx="11064240" cy="452628"/>
+          </a:xfrm>
+          <a:prstGeom prst="rect">
+            <a:avLst/>
+          </a:prstGeom>
+          <a:solidFill>
+            <a:srgbClr val="F2F6F8"/>
+          </a:solidFill>
+          <a:ln/>
+        </p:spPr>
+      </p:sp>
+      <p:sp>
+        <p:nvSpPr>
+          <p:cNvPr id="11" name="click-7"/>
+          <p:cNvSpPr/>
+          <p:nvPr/>
+        </p:nvSpPr>
+        <p:spPr>
+          <a:xfrm>
+            <a:off x="548640" y="2450592"/>
+            <a:ext cx="11064240" cy="452628"/>
+          </a:xfrm>
+          <a:prstGeom prst="rect">
+            <a:avLst/>
+          </a:prstGeom>
+          <a:solidFill>
+            <a:srgbClr val="FBEAD2"/>
+          </a:solidFill>
+          <a:ln/>
+        </p:spPr>
+      </p:sp>
+      <p:sp>
+        <p:nvSpPr>
+          <p:cNvPr id="12" name="Text 10"/>
+          <p:cNvSpPr/>
+          <p:nvPr/>
+        </p:nvSpPr>
+        <p:spPr>
+          <a:xfrm>
+            <a:off x="658368" y="2450592"/>
+            <a:ext cx="2066544" cy="452628"/>
+          </a:xfrm>
+          <a:prstGeom prst="rect">
+            <a:avLst/>
+          </a:prstGeom>
+          <a:noFill/>
+          <a:ln/>
+        </p:spPr>
+        <p:txBody>
+          <a:bodyPr wrap="square" lIns="0" tIns="0" rIns="0" bIns="0" rtlCol="0" anchor="ctr"/>
+          <a:lstStyle/>
+          <a:p>
+            <a:pPr indent="0" marL="0">
+              <a:buNone/>
+            </a:pPr>
+            <a:r>
+              <a:rPr lang="en-US" sz="1400" b="1" dirty="0">
+                <a:solidFill>
+                  <a:srgbClr val="1E2A36"/>
+                </a:solidFill>
+                <a:latin typeface="Calibri" pitchFamily="34" charset="0"/>
+                <a:ea typeface="Calibri" pitchFamily="34" charset="-122"/>
+                <a:cs typeface="Calibri" pitchFamily="34" charset="-120"/>
+              </a:rPr>
+              <a:t>Technical</a:t>
+            </a:r>
+            <a:endParaRPr lang="en-US" sz="1400" dirty="0"/>
+          </a:p>
+        </p:txBody>
+      </p:sp>
+      <p:sp>
+        <p:nvSpPr>
+          <p:cNvPr id="13" name="click-1"/>
+          <p:cNvSpPr/>
+          <p:nvPr/>
+        </p:nvSpPr>
+        <p:spPr>
+          <a:xfrm>
+            <a:off x="2834640" y="2450592"/>
+            <a:ext cx="1188720" cy="452628"/>
+          </a:xfrm>
+          <a:prstGeom prst="rect">
+            <a:avLst/>
+          </a:prstGeom>
+          <a:noFill/>
+          <a:ln/>
+        </p:spPr>
+        <p:txBody>
+          <a:bodyPr wrap="square" lIns="0" tIns="0" rIns="0" bIns="0" rtlCol="0" anchor="ctr"/>
+          <a:lstStyle/>
+          <a:p>
+            <a:pPr algn="ctr" indent="0" marL="0">
+              <a:buNone/>
+            </a:pPr>
+            <a:r>
+              <a:rPr lang="en-US" sz="1400" b="1" dirty="0">
+                <a:solidFill>
+                  <a:srgbClr val="D9614C"/>
+                </a:solidFill>
+                <a:latin typeface="Calibri" pitchFamily="34" charset="0"/>
+                <a:ea typeface="Calibri" pitchFamily="34" charset="-122"/>
+                <a:cs typeface="Calibri" pitchFamily="34" charset="-120"/>
+              </a:rPr>
+              <a:t>High</a:t>
+            </a:r>
+            <a:endParaRPr lang="en-US" sz="1400" dirty="0"/>
+          </a:p>
+        </p:txBody>
+      </p:sp>
+      <p:sp>
+        <p:nvSpPr>
+          <p:cNvPr id="14" name="click-1"/>
+          <p:cNvSpPr/>
+          <p:nvPr/>
+        </p:nvSpPr>
+        <p:spPr>
+          <a:xfrm>
+            <a:off x="4133088" y="2450592"/>
+            <a:ext cx="7370064" cy="452628"/>
+          </a:xfrm>
+          <a:prstGeom prst="rect">
+            <a:avLst/>
+          </a:prstGeom>
+          <a:noFill/>
+          <a:ln/>
+        </p:spPr>
+        <p:txBody>
+          <a:bodyPr wrap="square" lIns="0" tIns="0" rIns="0" bIns="0" rtlCol="0" anchor="ctr"/>
+          <a:lstStyle/>
+          <a:p>
+            <a:pPr indent="0" marL="0">
+              <a:buNone/>
+            </a:pPr>
+            <a:r>
+              <a:rPr lang="en-US" sz="1400" dirty="0">
+                <a:solidFill>
+                  <a:srgbClr val="1E2A36"/>
+                </a:solidFill>
+                <a:latin typeface="Calibri" pitchFamily="34" charset="0"/>
+                <a:ea typeface="Calibri" pitchFamily="34" charset="-122"/>
+                <a:cs typeface="Calibri" pitchFamily="34" charset="-120"/>
+              </a:rPr>
+              <a:t>Live queue pushed to every client in ~1s — never done real-time</a:t>
+            </a:r>
+            <a:endParaRPr lang="en-US" sz="1400" dirty="0"/>
+          </a:p>
+        </p:txBody>
+      </p:sp>
+      <p:sp>
+        <p:nvSpPr>
+          <p:cNvPr id="15" name="Shape 13"/>
+          <p:cNvSpPr/>
+          <p:nvPr/>
+        </p:nvSpPr>
+        <p:spPr>
+          <a:xfrm>
+            <a:off x="548640" y="2939796"/>
+            <a:ext cx="11064240" cy="452628"/>
+          </a:xfrm>
+          <a:prstGeom prst="rect">
+            <a:avLst/>
+          </a:prstGeom>
+          <a:solidFill>
+            <a:srgbClr val="F2F6F8"/>
+          </a:solidFill>
+          <a:ln/>
+        </p:spPr>
+      </p:sp>
+      <p:sp>
+        <p:nvSpPr>
+          <p:cNvPr id="16" name="Text 14"/>
+          <p:cNvSpPr/>
+          <p:nvPr/>
+        </p:nvSpPr>
+        <p:spPr>
+          <a:xfrm>
+            <a:off x="658368" y="2939796"/>
+            <a:ext cx="2066544" cy="452628"/>
+          </a:xfrm>
+          <a:prstGeom prst="rect">
+            <a:avLst/>
+          </a:prstGeom>
+          <a:noFill/>
+          <a:ln/>
+        </p:spPr>
+        <p:txBody>
+          <a:bodyPr wrap="square" lIns="0" tIns="0" rIns="0" bIns="0" rtlCol="0" anchor="ctr"/>
+          <a:lstStyle/>
+          <a:p>
+            <a:pPr indent="0" marL="0">
+              <a:buNone/>
+            </a:pPr>
+            <a:r>
+              <a:rPr lang="en-US" sz="1400" b="1" dirty="0">
+                <a:solidFill>
+                  <a:srgbClr val="1E2A36"/>
+                </a:solidFill>
+                <a:latin typeface="Calibri" pitchFamily="34" charset="0"/>
+                <a:ea typeface="Calibri" pitchFamily="34" charset="-122"/>
+                <a:cs typeface="Calibri" pitchFamily="34" charset="-120"/>
+              </a:rPr>
+              <a:t>Schedule</a:t>
+            </a:r>
+            <a:endParaRPr lang="en-US" sz="1400" dirty="0"/>
+          </a:p>
+        </p:txBody>
+      </p:sp>
+      <p:sp>
+        <p:nvSpPr>
+          <p:cNvPr id="17" name="click-2"/>
+          <p:cNvSpPr/>
+          <p:nvPr/>
+        </p:nvSpPr>
+        <p:spPr>
+          <a:xfrm>
+            <a:off x="2834640" y="2939796"/>
+            <a:ext cx="1188720" cy="452628"/>
+          </a:xfrm>
+          <a:prstGeom prst="rect">
+            <a:avLst/>
+          </a:prstGeom>
+          <a:noFill/>
+          <a:ln/>
+        </p:spPr>
+        <p:txBody>
+          <a:bodyPr wrap="square" lIns="0" tIns="0" rIns="0" bIns="0" rtlCol="0" anchor="ctr"/>
+          <a:lstStyle/>
+          <a:p>
+            <a:pPr algn="ctr" indent="0" marL="0">
+              <a:buNone/>
+            </a:pPr>
+            <a:r>
+              <a:rPr lang="en-US" sz="1400" b="1" dirty="0">
+                <a:solidFill>
+                  <a:srgbClr val="5F7284"/>
+                </a:solidFill>
+                <a:latin typeface="Calibri" pitchFamily="34" charset="0"/>
+                <a:ea typeface="Calibri" pitchFamily="34" charset="-122"/>
+                <a:cs typeface="Calibri" pitchFamily="34" charset="-120"/>
+              </a:rPr>
+              <a:t>Med</a:t>
+            </a:r>
+            <a:endParaRPr lang="en-US" sz="1400" dirty="0"/>
+          </a:p>
+        </p:txBody>
+      </p:sp>
+      <p:sp>
+        <p:nvSpPr>
+          <p:cNvPr id="18" name="click-2"/>
+          <p:cNvSpPr/>
+          <p:nvPr/>
+        </p:nvSpPr>
+        <p:spPr>
+          <a:xfrm>
+            <a:off x="4133088" y="2939796"/>
+            <a:ext cx="7370064" cy="452628"/>
+          </a:xfrm>
+          <a:prstGeom prst="rect">
+            <a:avLst/>
+          </a:prstGeom>
+          <a:noFill/>
+          <a:ln/>
+        </p:spPr>
+        <p:txBody>
+          <a:bodyPr wrap="square" lIns="0" tIns="0" rIns="0" bIns="0" rtlCol="0" anchor="ctr"/>
+          <a:lstStyle/>
+          <a:p>
+            <a:pPr indent="0" marL="0">
+              <a:buNone/>
+            </a:pPr>
+            <a:r>
+              <a:rPr lang="en-US" sz="1400" dirty="0">
+                <a:solidFill>
+                  <a:srgbClr val="1E2A36"/>
+                </a:solidFill>
+                <a:latin typeface="Calibri" pitchFamily="34" charset="0"/>
+                <a:ea typeface="Calibri" pitchFamily="34" charset="-122"/>
+                <a:cs typeface="Calibri" pitchFamily="34" charset="-120"/>
+              </a:rPr>
+              <a:t>One course, add / see-position / claim — that slice fits</a:t>
+            </a:r>
+            <a:endParaRPr lang="en-US" sz="1400" dirty="0"/>
+          </a:p>
+        </p:txBody>
+      </p:sp>
+      <p:sp>
+        <p:nvSpPr>
+          <p:cNvPr id="19" name="Shape 17"/>
+          <p:cNvSpPr/>
+          <p:nvPr/>
+        </p:nvSpPr>
+        <p:spPr>
+          <a:xfrm>
+            <a:off x="548640" y="3429000"/>
+            <a:ext cx="11064240" cy="452628"/>
+          </a:xfrm>
+          <a:prstGeom prst="rect">
+            <a:avLst/>
+          </a:prstGeom>
+          <a:solidFill>
+            <a:srgbClr val="F2F6F8"/>
+          </a:solidFill>
+          <a:ln/>
+        </p:spPr>
+      </p:sp>
+      <p:sp>
+        <p:nvSpPr>
+          <p:cNvPr id="20" name="Text 18"/>
+          <p:cNvSpPr/>
+          <p:nvPr/>
+        </p:nvSpPr>
+        <p:spPr>
+          <a:xfrm>
+            <a:off x="658368" y="3429000"/>
+            <a:ext cx="2066544" cy="452628"/>
+          </a:xfrm>
+          <a:prstGeom prst="rect">
+            <a:avLst/>
+          </a:prstGeom>
+          <a:noFill/>
+          <a:ln/>
+        </p:spPr>
+        <p:txBody>
+          <a:bodyPr wrap="square" lIns="0" tIns="0" rIns="0" bIns="0" rtlCol="0" anchor="ctr"/>
+          <a:lstStyle/>
+          <a:p>
+            <a:pPr indent="0" marL="0">
+              <a:buNone/>
+            </a:pPr>
+            <a:r>
+              <a:rPr lang="en-US" sz="1400" b="1" dirty="0">
+                <a:solidFill>
+                  <a:srgbClr val="1E2A36"/>
+                </a:solidFill>
+                <a:latin typeface="Calibri" pitchFamily="34" charset="0"/>
+                <a:ea typeface="Calibri" pitchFamily="34" charset="-122"/>
+                <a:cs typeface="Calibri" pitchFamily="34" charset="-120"/>
+              </a:rPr>
+              <a:t>Dependency</a:t>
+            </a:r>
+            <a:endParaRPr lang="en-US" sz="1400" dirty="0"/>
+          </a:p>
+        </p:txBody>
+      </p:sp>
+      <p:sp>
+        <p:nvSpPr>
+          <p:cNvPr id="21" name="click-3"/>
+          <p:cNvSpPr/>
+          <p:nvPr/>
+        </p:nvSpPr>
+        <p:spPr>
+          <a:xfrm>
+            <a:off x="2834640" y="3429000"/>
+            <a:ext cx="1188720" cy="452628"/>
+          </a:xfrm>
+          <a:prstGeom prst="rect">
+            <a:avLst/>
+          </a:prstGeom>
+          <a:noFill/>
+          <a:ln/>
+        </p:spPr>
+        <p:txBody>
+          <a:bodyPr wrap="square" lIns="0" tIns="0" rIns="0" bIns="0" rtlCol="0" anchor="ctr"/>
+          <a:lstStyle/>
+          <a:p>
+            <a:pPr algn="ctr" indent="0" marL="0">
+              <a:buNone/>
+            </a:pPr>
+            <a:r>
+              <a:rPr lang="en-US" sz="1400" b="1" dirty="0">
+                <a:solidFill>
+                  <a:srgbClr val="5F7284"/>
+                </a:solidFill>
+                <a:latin typeface="Calibri" pitchFamily="34" charset="0"/>
+                <a:ea typeface="Calibri" pitchFamily="34" charset="-122"/>
+                <a:cs typeface="Calibri" pitchFamily="34" charset="-120"/>
+              </a:rPr>
+              <a:t>Med</a:t>
+            </a:r>
+            <a:endParaRPr lang="en-US" sz="1400" dirty="0"/>
+          </a:p>
+        </p:txBody>
+      </p:sp>
+      <p:sp>
+        <p:nvSpPr>
+          <p:cNvPr id="22" name="click-3"/>
+          <p:cNvSpPr/>
+          <p:nvPr/>
+        </p:nvSpPr>
+        <p:spPr>
+          <a:xfrm>
+            <a:off x="4133088" y="3429000"/>
+            <a:ext cx="7370064" cy="452628"/>
+          </a:xfrm>
+          <a:prstGeom prst="rect">
+            <a:avLst/>
+          </a:prstGeom>
+          <a:noFill/>
+          <a:ln/>
+        </p:spPr>
+        <p:txBody>
+          <a:bodyPr wrap="square" lIns="0" tIns="0" rIns="0" bIns="0" rtlCol="0" anchor="ctr"/>
+          <a:lstStyle/>
+          <a:p>
+            <a:pPr indent="0" marL="0">
+              <a:buNone/>
+            </a:pPr>
+            <a:r>
+              <a:rPr lang="en-US" sz="1400" dirty="0">
+                <a:solidFill>
+                  <a:srgbClr val="1E2A36"/>
+                </a:solidFill>
+                <a:latin typeface="Calibri" pitchFamily="34" charset="0"/>
+                <a:ea typeface="Calibri" pitchFamily="34" charset="-122"/>
+                <a:cs typeface="Calibri" pitchFamily="34" charset="-120"/>
+              </a:rPr>
+              <a:t>Build WebSockets or lean on a managed service (rate limits?)</a:t>
+            </a:r>
+            <a:endParaRPr lang="en-US" sz="1400" dirty="0"/>
+          </a:p>
+        </p:txBody>
+      </p:sp>
+      <p:sp>
+        <p:nvSpPr>
+          <p:cNvPr id="23" name="Shape 21"/>
+          <p:cNvSpPr/>
+          <p:nvPr/>
+        </p:nvSpPr>
+        <p:spPr>
+          <a:xfrm>
+            <a:off x="548640" y="3918204"/>
+            <a:ext cx="11064240" cy="452628"/>
+          </a:xfrm>
+          <a:prstGeom prst="rect">
+            <a:avLst/>
+          </a:prstGeom>
+          <a:solidFill>
+            <a:srgbClr val="F2F6F8"/>
+          </a:solidFill>
+          <a:ln/>
+        </p:spPr>
+      </p:sp>
+      <p:sp>
+        <p:nvSpPr>
+          <p:cNvPr id="24" name="click-7"/>
+          <p:cNvSpPr/>
+          <p:nvPr/>
+        </p:nvSpPr>
+        <p:spPr>
+          <a:xfrm>
+            <a:off x="548640" y="3918204"/>
+            <a:ext cx="11064240" cy="452628"/>
+          </a:xfrm>
+          <a:prstGeom prst="rect">
+            <a:avLst/>
+          </a:prstGeom>
+          <a:solidFill>
+            <a:srgbClr val="FBEAD2"/>
+          </a:solidFill>
+          <a:ln/>
+        </p:spPr>
+      </p:sp>
+      <p:sp>
+        <p:nvSpPr>
+          <p:cNvPr id="25" name="Text 23"/>
+          <p:cNvSpPr/>
+          <p:nvPr/>
+        </p:nvSpPr>
+        <p:spPr>
+          <a:xfrm>
+            <a:off x="658368" y="3918204"/>
+            <a:ext cx="2066544" cy="452628"/>
+          </a:xfrm>
+          <a:prstGeom prst="rect">
+            <a:avLst/>
+          </a:prstGeom>
+          <a:noFill/>
+          <a:ln/>
+        </p:spPr>
+        <p:txBody>
+          <a:bodyPr wrap="square" lIns="0" tIns="0" rIns="0" bIns="0" rtlCol="0" anchor="ctr"/>
+          <a:lstStyle/>
+          <a:p>
+            <a:pPr indent="0" marL="0">
+              <a:buNone/>
+            </a:pPr>
+            <a:r>
+              <a:rPr lang="en-US" sz="1400" b="1" dirty="0">
+                <a:solidFill>
+                  <a:srgbClr val="1E2A36"/>
+                </a:solidFill>
+                <a:latin typeface="Calibri" pitchFamily="34" charset="0"/>
+                <a:ea typeface="Calibri" pitchFamily="34" charset="-122"/>
+                <a:cs typeface="Calibri" pitchFamily="34" charset="-120"/>
+              </a:rPr>
+              <a:t>Skill</a:t>
+            </a:r>
+            <a:endParaRPr lang="en-US" sz="1400" dirty="0"/>
+          </a:p>
+        </p:txBody>
+      </p:sp>
+      <p:sp>
+        <p:nvSpPr>
+          <p:cNvPr id="26" name="click-4"/>
+          <p:cNvSpPr/>
+          <p:nvPr/>
+        </p:nvSpPr>
+        <p:spPr>
+          <a:xfrm>
+            <a:off x="2834640" y="3918204"/>
+            <a:ext cx="1188720" cy="452628"/>
+          </a:xfrm>
+          <a:prstGeom prst="rect">
+            <a:avLst/>
+          </a:prstGeom>
+          <a:noFill/>
+          <a:ln/>
+        </p:spPr>
+        <p:txBody>
+          <a:bodyPr wrap="square" lIns="0" tIns="0" rIns="0" bIns="0" rtlCol="0" anchor="ctr"/>
+          <a:lstStyle/>
+          <a:p>
+            <a:pPr algn="ctr" indent="0" marL="0">
+              <a:buNone/>
+            </a:pPr>
+            <a:r>
+              <a:rPr lang="en-US" sz="1400" b="1" dirty="0">
+                <a:solidFill>
+                  <a:srgbClr val="D9614C"/>
+                </a:solidFill>
+                <a:latin typeface="Calibri" pitchFamily="34" charset="0"/>
+                <a:ea typeface="Calibri" pitchFamily="34" charset="-122"/>
+                <a:cs typeface="Calibri" pitchFamily="34" charset="-120"/>
+              </a:rPr>
+              <a:t>High</a:t>
+            </a:r>
+            <a:endParaRPr lang="en-US" sz="1400" dirty="0"/>
+          </a:p>
+        </p:txBody>
+      </p:sp>
+      <p:sp>
+        <p:nvSpPr>
+          <p:cNvPr id="27" name="click-4"/>
+          <p:cNvSpPr/>
+          <p:nvPr/>
+        </p:nvSpPr>
+        <p:spPr>
+          <a:xfrm>
+            <a:off x="4133088" y="3918204"/>
+            <a:ext cx="7370064" cy="452628"/>
+          </a:xfrm>
+          <a:prstGeom prst="rect">
+            <a:avLst/>
+          </a:prstGeom>
+          <a:noFill/>
+          <a:ln/>
+        </p:spPr>
+        <p:txBody>
+          <a:bodyPr wrap="square" lIns="0" tIns="0" rIns="0" bIns="0" rtlCol="0" anchor="ctr"/>
+          <a:lstStyle/>
+          <a:p>
+            <a:pPr indent="0" marL="0">
+              <a:buNone/>
+            </a:pPr>
+            <a:r>
+              <a:rPr lang="en-US" sz="1400" dirty="0">
+                <a:solidFill>
+                  <a:srgbClr val="1E2A36"/>
+                </a:solidFill>
+                <a:latin typeface="Calibri" pitchFamily="34" charset="0"/>
+                <a:ea typeface="Calibri" pitchFamily="34" charset="-122"/>
+                <a:cs typeface="Calibri" pitchFamily="34" charset="-120"/>
+              </a:rPr>
+              <a:t>Built request/response apps, never real-time — same root as Technical</a:t>
+            </a:r>
+            <a:endParaRPr lang="en-US" sz="1400" dirty="0"/>
+          </a:p>
+        </p:txBody>
+      </p:sp>
+      <p:sp>
+        <p:nvSpPr>
+          <p:cNvPr id="28" name="Shape 26"/>
+          <p:cNvSpPr/>
+          <p:nvPr/>
+        </p:nvSpPr>
+        <p:spPr>
+          <a:xfrm>
+            <a:off x="548640" y="4407408"/>
+            <a:ext cx="11064240" cy="452628"/>
+          </a:xfrm>
+          <a:prstGeom prst="rect">
+            <a:avLst/>
+          </a:prstGeom>
+          <a:solidFill>
+            <a:srgbClr val="F2F6F8"/>
+          </a:solidFill>
+          <a:ln/>
+        </p:spPr>
+      </p:sp>
+      <p:sp>
+        <p:nvSpPr>
+          <p:cNvPr id="29" name="Text 27"/>
+          <p:cNvSpPr/>
+          <p:nvPr/>
+        </p:nvSpPr>
+        <p:spPr>
+          <a:xfrm>
+            <a:off x="658368" y="4407408"/>
+            <a:ext cx="2066544" cy="452628"/>
+          </a:xfrm>
+          <a:prstGeom prst="rect">
+            <a:avLst/>
+          </a:prstGeom>
+          <a:noFill/>
+          <a:ln/>
+        </p:spPr>
+        <p:txBody>
+          <a:bodyPr wrap="square" lIns="0" tIns="0" rIns="0" bIns="0" rtlCol="0" anchor="ctr"/>
+          <a:lstStyle/>
+          <a:p>
+            <a:pPr indent="0" marL="0">
+              <a:buNone/>
+            </a:pPr>
+            <a:r>
+              <a:rPr lang="en-US" sz="1400" b="1" dirty="0">
+                <a:solidFill>
+                  <a:srgbClr val="1E2A36"/>
+                </a:solidFill>
+                <a:latin typeface="Calibri" pitchFamily="34" charset="0"/>
+                <a:ea typeface="Calibri" pitchFamily="34" charset="-122"/>
+                <a:cs typeface="Calibri" pitchFamily="34" charset="-120"/>
+              </a:rPr>
+              <a:t>Adoption</a:t>
+            </a:r>
+            <a:endParaRPr lang="en-US" sz="1400" dirty="0"/>
+          </a:p>
+        </p:txBody>
+      </p:sp>
+      <p:sp>
+        <p:nvSpPr>
+          <p:cNvPr id="30" name="click-5"/>
+          <p:cNvSpPr/>
+          <p:nvPr/>
+        </p:nvSpPr>
+        <p:spPr>
+          <a:xfrm>
+            <a:off x="2834640" y="4407408"/>
+            <a:ext cx="1188720" cy="452628"/>
+          </a:xfrm>
+          <a:prstGeom prst="rect">
+            <a:avLst/>
+          </a:prstGeom>
+          <a:noFill/>
+          <a:ln/>
+        </p:spPr>
+        <p:txBody>
+          <a:bodyPr wrap="square" lIns="0" tIns="0" rIns="0" bIns="0" rtlCol="0" anchor="ctr"/>
+          <a:lstStyle/>
+          <a:p>
+            <a:pPr algn="ctr" indent="0" marL="0">
+              <a:buNone/>
+            </a:pPr>
+            <a:r>
+              <a:rPr lang="en-US" sz="1400" b="1" dirty="0">
+                <a:solidFill>
+                  <a:srgbClr val="5F7284"/>
+                </a:solidFill>
+                <a:latin typeface="Calibri" pitchFamily="34" charset="0"/>
+                <a:ea typeface="Calibri" pitchFamily="34" charset="-122"/>
+                <a:cs typeface="Calibri" pitchFamily="34" charset="-120"/>
+              </a:rPr>
+              <a:t>Med</a:t>
+            </a:r>
+            <a:endParaRPr lang="en-US" sz="1400" dirty="0"/>
+          </a:p>
+        </p:txBody>
+      </p:sp>
+      <p:sp>
+        <p:nvSpPr>
+          <p:cNvPr id="31" name="click-5"/>
+          <p:cNvSpPr/>
+          <p:nvPr/>
+        </p:nvSpPr>
+        <p:spPr>
+          <a:xfrm>
+            <a:off x="4133088" y="4407408"/>
+            <a:ext cx="7370064" cy="452628"/>
+          </a:xfrm>
+          <a:prstGeom prst="rect">
+            <a:avLst/>
+          </a:prstGeom>
+          <a:noFill/>
+          <a:ln/>
+        </p:spPr>
+        <p:txBody>
+          <a:bodyPr wrap="square" lIns="0" tIns="0" rIns="0" bIns="0" rtlCol="0" anchor="ctr"/>
+          <a:lstStyle/>
+          <a:p>
+            <a:pPr indent="0" marL="0">
+              <a:buNone/>
+            </a:pPr>
+            <a:r>
+              <a:rPr lang="en-US" sz="1400" dirty="0">
+                <a:solidFill>
+                  <a:srgbClr val="1E2A36"/>
+                </a:solidFill>
+                <a:latin typeface="Calibri" pitchFamily="34" charset="0"/>
+                <a:ea typeface="Calibri" pitchFamily="34" charset="-122"/>
+                <a:cs typeface="Calibri" pitchFamily="34" charset="-120"/>
+              </a:rPr>
+              <a:t>Will students open an app vs. just walk in? Confirm the “I get skipped” pain is real</a:t>
+            </a:r>
+            <a:endParaRPr lang="en-US" sz="1400" dirty="0"/>
+          </a:p>
+        </p:txBody>
+      </p:sp>
+      <p:sp>
+        <p:nvSpPr>
+          <p:cNvPr id="32" name="Shape 30"/>
+          <p:cNvSpPr/>
+          <p:nvPr/>
+        </p:nvSpPr>
+        <p:spPr>
+          <a:xfrm>
+            <a:off x="548640" y="4896612"/>
+            <a:ext cx="11064240" cy="452628"/>
+          </a:xfrm>
+          <a:prstGeom prst="rect">
+            <a:avLst/>
+          </a:prstGeom>
+          <a:solidFill>
+            <a:srgbClr val="F2F6F8"/>
+          </a:solidFill>
+          <a:ln/>
+        </p:spPr>
+      </p:sp>
+      <p:sp>
+        <p:nvSpPr>
+          <p:cNvPr id="33" name="Text 31"/>
+          <p:cNvSpPr/>
+          <p:nvPr/>
+        </p:nvSpPr>
+        <p:spPr>
+          <a:xfrm>
+            <a:off x="658368" y="4896612"/>
+            <a:ext cx="2066544" cy="452628"/>
+          </a:xfrm>
+          <a:prstGeom prst="rect">
+            <a:avLst/>
+          </a:prstGeom>
+          <a:noFill/>
+          <a:ln/>
+        </p:spPr>
+        <p:txBody>
+          <a:bodyPr wrap="square" lIns="0" tIns="0" rIns="0" bIns="0" rtlCol="0" anchor="ctr"/>
+          <a:lstStyle/>
+          <a:p>
+            <a:pPr indent="0" marL="0">
+              <a:buNone/>
+            </a:pPr>
+            <a:r>
+              <a:rPr lang="en-US" sz="1400" b="1" dirty="0">
+                <a:solidFill>
+                  <a:srgbClr val="1E2A36"/>
+                </a:solidFill>
+                <a:latin typeface="Calibri" pitchFamily="34" charset="0"/>
+                <a:ea typeface="Calibri" pitchFamily="34" charset="-122"/>
+                <a:cs typeface="Calibri" pitchFamily="34" charset="-120"/>
+              </a:rPr>
+              <a:t>Maintenance</a:t>
+            </a:r>
+            <a:endParaRPr lang="en-US" sz="1400" dirty="0"/>
+          </a:p>
+        </p:txBody>
+      </p:sp>
+      <p:sp>
+        <p:nvSpPr>
+          <p:cNvPr id="34" name="click-6"/>
+          <p:cNvSpPr/>
+          <p:nvPr/>
+        </p:nvSpPr>
+        <p:spPr>
+          <a:xfrm>
+            <a:off x="2834640" y="4896612"/>
+            <a:ext cx="1188720" cy="452628"/>
+          </a:xfrm>
+          <a:prstGeom prst="rect">
+            <a:avLst/>
+          </a:prstGeom>
+          <a:noFill/>
+          <a:ln/>
+        </p:spPr>
+        <p:txBody>
+          <a:bodyPr wrap="square" lIns="0" tIns="0" rIns="0" bIns="0" rtlCol="0" anchor="ctr"/>
+          <a:lstStyle/>
+          <a:p>
+            <a:pPr algn="ctr" indent="0" marL="0">
+              <a:buNone/>
+            </a:pPr>
+            <a:r>
+              <a:rPr lang="en-US" sz="1400" b="1" dirty="0">
+                <a:solidFill>
+                  <a:srgbClr val="5F7284"/>
+                </a:solidFill>
+                <a:latin typeface="Calibri" pitchFamily="34" charset="0"/>
+                <a:ea typeface="Calibri" pitchFamily="34" charset="-122"/>
+                <a:cs typeface="Calibri" pitchFamily="34" charset="-120"/>
+              </a:rPr>
+              <a:t>Med</a:t>
+            </a:r>
+            <a:endParaRPr lang="en-US" sz="1400" dirty="0"/>
+          </a:p>
+        </p:txBody>
+      </p:sp>
+      <p:sp>
+        <p:nvSpPr>
+          <p:cNvPr id="35" name="click-6"/>
+          <p:cNvSpPr/>
+          <p:nvPr/>
+        </p:nvSpPr>
+        <p:spPr>
+          <a:xfrm>
+            <a:off x="4133088" y="4896612"/>
+            <a:ext cx="7370064" cy="452628"/>
+          </a:xfrm>
+          <a:prstGeom prst="rect">
+            <a:avLst/>
+          </a:prstGeom>
+          <a:noFill/>
+          <a:ln/>
+        </p:spPr>
+        <p:txBody>
+          <a:bodyPr wrap="square" lIns="0" tIns="0" rIns="0" bIns="0" rtlCol="0" anchor="ctr"/>
+          <a:lstStyle/>
+          <a:p>
+            <a:pPr indent="0" marL="0">
+              <a:buNone/>
+            </a:pPr>
+            <a:r>
+              <a:rPr lang="en-US" sz="1400" dirty="0">
+                <a:solidFill>
+                  <a:srgbClr val="1E2A36"/>
+                </a:solidFill>
+                <a:latin typeface="Calibri" pitchFamily="34" charset="0"/>
+                <a:ea typeface="Calibri" pitchFamily="34" charset="-122"/>
+                <a:cs typeface="Calibri" pitchFamily="34" charset="-120"/>
+              </a:rPr>
+              <a:t>Runs live every session; a crash is very visible</a:t>
+            </a:r>
+            <a:endParaRPr lang="en-US" sz="1400" dirty="0"/>
+          </a:p>
+        </p:txBody>
+      </p:sp>
+      <p:sp>
+        <p:nvSpPr>
+          <p:cNvPr id="36" name="click-7"/>
+          <p:cNvSpPr/>
+          <p:nvPr/>
+        </p:nvSpPr>
+        <p:spPr>
+          <a:xfrm>
+            <a:off x="548640" y="5422392"/>
+            <a:ext cx="11064240" cy="758952"/>
           </a:xfrm>
           <a:prstGeom prst="roundRect">
             <a:avLst>
-              <a:gd name="adj" fmla="val 9184"/>
+              <a:gd name="adj" fmla="val 10843"/>
             </a:avLst>
           </a:prstGeom>
           <a:solidFill>
@@ -11592,13 +11118,13 @@
       </p:sp>
       <p:sp>
         <p:nvSpPr>
-          <p:cNvPr id="8" name="Shape 5"/>
-          <p:cNvSpPr/>
-          <p:nvPr/>
-        </p:nvSpPr>
-        <p:spPr>
-          <a:xfrm>
-            <a:off x="841248" y="5504688"/>
+          <p:cNvPr id="37" name="click-7"/>
+          <p:cNvSpPr/>
+          <p:nvPr/>
+        </p:nvSpPr>
+        <p:spPr>
+          <a:xfrm>
+            <a:off x="841248" y="5568696"/>
             <a:ext cx="457200" cy="457200"/>
           </a:xfrm>
           <a:prstGeom prst="ellipse">
@@ -11612,7 +11138,7 @@
       </p:sp>
       <p:pic>
         <p:nvPicPr>
-          <p:cNvPr id="9" name="Image 0" descr="preencoded.png">    </p:cNvPr>
+          <p:cNvPr id="38" name="click-7" descr="preencoded.png">    </p:cNvPr>
           <p:cNvPicPr>
             <a:picLocks noChangeAspect="1"/>
           </p:cNvPicPr>
@@ -11626,7 +11152,7 @@
         </p:blipFill>
         <p:spPr>
           <a:xfrm>
-            <a:off x="964692" y="5628132"/>
+            <a:off x="964692" y="5692140"/>
             <a:ext cx="210312" cy="210312"/>
           </a:xfrm>
           <a:prstGeom prst="rect">
@@ -11636,14 +11162,14 @@
       </p:pic>
       <p:sp>
         <p:nvSpPr>
-          <p:cNvPr id="10" name="Text 6"/>
-          <p:cNvSpPr/>
-          <p:nvPr/>
-        </p:nvSpPr>
-        <p:spPr>
-          <a:xfrm>
-            <a:off x="1463040" y="5285232"/>
-            <a:ext cx="9875520" cy="896112"/>
+          <p:cNvPr id="39" name="click-7"/>
+          <p:cNvSpPr/>
+          <p:nvPr/>
+        </p:nvSpPr>
+        <p:spPr>
+          <a:xfrm>
+            <a:off x="1463040" y="5422392"/>
+            <a:ext cx="9875520" cy="758952"/>
           </a:xfrm>
           <a:prstGeom prst="rect">
             <a:avLst/>
@@ -11695,7 +11221,7 @@
       </p:sp>
       <p:sp>
         <p:nvSpPr>
-          <p:cNvPr id="11" name="Text 7"/>
+          <p:cNvPr id="40" name="Text 37"/>
           <p:cNvSpPr/>
           <p:nvPr/>
         </p:nvSpPr>
@@ -11734,7 +11260,7 @@
       </p:sp>
       <p:sp>
         <p:nvSpPr>
-          <p:cNvPr id="12" name="Text 8"/>
+          <p:cNvPr id="41" name="Text 38"/>
           <p:cNvSpPr/>
           <p:nvPr/>
         </p:nvSpPr>
@@ -11776,6 +11302,667 @@
   <p:clrMapOvr>
     <a:masterClrMapping/>
   </p:clrMapOvr>
+  <p:timing>
+    <p:tnLst>
+      <p:par>
+        <p:cTn id="1" dur="indefinite" restart="never" nodeType="tmRoot">
+          <p:childTnLst>
+            <p:seq concurrent="1" nextAc="seek">
+              <p:cTn id="2" dur="indefinite" nodeType="mainSeq">
+                <p:childTnLst>
+                  <p:par>
+                    <p:cTn id="3" fill="hold">
+                      <p:stCondLst>
+                        <p:cond delay="indefinite"/>
+                      </p:stCondLst>
+                      <p:childTnLst>
+                        <p:par>
+                          <p:cTn id="4" fill="hold">
+                            <p:stCondLst>
+                              <p:cond delay="0"/>
+                            </p:stCondLst>
+                            <p:childTnLst>
+                              <p:par>
+                                <p:cTn id="6" presetID="1" presetClass="entr" presetSubtype="0" fill="hold" grpId="0" nodeType="clickEffect">
+                                  <p:stCondLst>
+                                    <p:cond delay="0"/>
+                                  </p:stCondLst>
+                                  <p:childTnLst>
+                                    <p:set>
+                                      <p:cBhvr>
+                                        <p:cTn id="5" dur="1" fill="hold">
+                                          <p:stCondLst>
+                                            <p:cond delay="0"/>
+                                          </p:stCondLst>
+                                        </p:cTn>
+                                        <p:tgtEl>
+                                          <p:spTgt spid="13"/>
+                                        </p:tgtEl>
+                                        <p:attrNameLst>
+                                          <p:attrName>style.visibility</p:attrName>
+                                        </p:attrNameLst>
+                                      </p:cBhvr>
+                                      <p:to>
+                                        <p:strVal val="visible"/>
+                                      </p:to>
+                                    </p:set>
+                                  </p:childTnLst>
+                                </p:cTn>
+                              </p:par>
+                              <p:par>
+                                <p:cTn id="8" presetID="1" presetClass="entr" presetSubtype="0" fill="hold" grpId="0" nodeType="withEffect">
+                                  <p:stCondLst>
+                                    <p:cond delay="0"/>
+                                  </p:stCondLst>
+                                  <p:childTnLst>
+                                    <p:set>
+                                      <p:cBhvr>
+                                        <p:cTn id="7" dur="1" fill="hold">
+                                          <p:stCondLst>
+                                            <p:cond delay="0"/>
+                                          </p:stCondLst>
+                                        </p:cTn>
+                                        <p:tgtEl>
+                                          <p:spTgt spid="14"/>
+                                        </p:tgtEl>
+                                        <p:attrNameLst>
+                                          <p:attrName>style.visibility</p:attrName>
+                                        </p:attrNameLst>
+                                      </p:cBhvr>
+                                      <p:to>
+                                        <p:strVal val="visible"/>
+                                      </p:to>
+                                    </p:set>
+                                  </p:childTnLst>
+                                </p:cTn>
+                              </p:par>
+                            </p:childTnLst>
+                          </p:cTn>
+                        </p:par>
+                      </p:childTnLst>
+                    </p:cTn>
+                  </p:par>
+                  <p:par>
+                    <p:cTn id="9" fill="hold">
+                      <p:stCondLst>
+                        <p:cond delay="indefinite"/>
+                      </p:stCondLst>
+                      <p:childTnLst>
+                        <p:par>
+                          <p:cTn id="10" fill="hold">
+                            <p:stCondLst>
+                              <p:cond delay="0"/>
+                            </p:stCondLst>
+                            <p:childTnLst>
+                              <p:par>
+                                <p:cTn id="12" presetID="1" presetClass="entr" presetSubtype="0" fill="hold" grpId="0" nodeType="clickEffect">
+                                  <p:stCondLst>
+                                    <p:cond delay="0"/>
+                                  </p:stCondLst>
+                                  <p:childTnLst>
+                                    <p:set>
+                                      <p:cBhvr>
+                                        <p:cTn id="11" dur="1" fill="hold">
+                                          <p:stCondLst>
+                                            <p:cond delay="0"/>
+                                          </p:stCondLst>
+                                        </p:cTn>
+                                        <p:tgtEl>
+                                          <p:spTgt spid="17"/>
+                                        </p:tgtEl>
+                                        <p:attrNameLst>
+                                          <p:attrName>style.visibility</p:attrName>
+                                        </p:attrNameLst>
+                                      </p:cBhvr>
+                                      <p:to>
+                                        <p:strVal val="visible"/>
+                                      </p:to>
+                                    </p:set>
+                                  </p:childTnLst>
+                                </p:cTn>
+                              </p:par>
+                              <p:par>
+                                <p:cTn id="14" presetID="1" presetClass="entr" presetSubtype="0" fill="hold" grpId="0" nodeType="withEffect">
+                                  <p:stCondLst>
+                                    <p:cond delay="0"/>
+                                  </p:stCondLst>
+                                  <p:childTnLst>
+                                    <p:set>
+                                      <p:cBhvr>
+                                        <p:cTn id="13" dur="1" fill="hold">
+                                          <p:stCondLst>
+                                            <p:cond delay="0"/>
+                                          </p:stCondLst>
+                                        </p:cTn>
+                                        <p:tgtEl>
+                                          <p:spTgt spid="18"/>
+                                        </p:tgtEl>
+                                        <p:attrNameLst>
+                                          <p:attrName>style.visibility</p:attrName>
+                                        </p:attrNameLst>
+                                      </p:cBhvr>
+                                      <p:to>
+                                        <p:strVal val="visible"/>
+                                      </p:to>
+                                    </p:set>
+                                  </p:childTnLst>
+                                </p:cTn>
+                              </p:par>
+                            </p:childTnLst>
+                          </p:cTn>
+                        </p:par>
+                      </p:childTnLst>
+                    </p:cTn>
+                  </p:par>
+                  <p:par>
+                    <p:cTn id="15" fill="hold">
+                      <p:stCondLst>
+                        <p:cond delay="indefinite"/>
+                      </p:stCondLst>
+                      <p:childTnLst>
+                        <p:par>
+                          <p:cTn id="16" fill="hold">
+                            <p:stCondLst>
+                              <p:cond delay="0"/>
+                            </p:stCondLst>
+                            <p:childTnLst>
+                              <p:par>
+                                <p:cTn id="18" presetID="1" presetClass="entr" presetSubtype="0" fill="hold" grpId="0" nodeType="clickEffect">
+                                  <p:stCondLst>
+                                    <p:cond delay="0"/>
+                                  </p:stCondLst>
+                                  <p:childTnLst>
+                                    <p:set>
+                                      <p:cBhvr>
+                                        <p:cTn id="17" dur="1" fill="hold">
+                                          <p:stCondLst>
+                                            <p:cond delay="0"/>
+                                          </p:stCondLst>
+                                        </p:cTn>
+                                        <p:tgtEl>
+                                          <p:spTgt spid="21"/>
+                                        </p:tgtEl>
+                                        <p:attrNameLst>
+                                          <p:attrName>style.visibility</p:attrName>
+                                        </p:attrNameLst>
+                                      </p:cBhvr>
+                                      <p:to>
+                                        <p:strVal val="visible"/>
+                                      </p:to>
+                                    </p:set>
+                                  </p:childTnLst>
+                                </p:cTn>
+                              </p:par>
+                              <p:par>
+                                <p:cTn id="20" presetID="1" presetClass="entr" presetSubtype="0" fill="hold" grpId="0" nodeType="withEffect">
+                                  <p:stCondLst>
+                                    <p:cond delay="0"/>
+                                  </p:stCondLst>
+                                  <p:childTnLst>
+                                    <p:set>
+                                      <p:cBhvr>
+                                        <p:cTn id="19" dur="1" fill="hold">
+                                          <p:stCondLst>
+                                            <p:cond delay="0"/>
+                                          </p:stCondLst>
+                                        </p:cTn>
+                                        <p:tgtEl>
+                                          <p:spTgt spid="22"/>
+                                        </p:tgtEl>
+                                        <p:attrNameLst>
+                                          <p:attrName>style.visibility</p:attrName>
+                                        </p:attrNameLst>
+                                      </p:cBhvr>
+                                      <p:to>
+                                        <p:strVal val="visible"/>
+                                      </p:to>
+                                    </p:set>
+                                  </p:childTnLst>
+                                </p:cTn>
+                              </p:par>
+                            </p:childTnLst>
+                          </p:cTn>
+                        </p:par>
+                      </p:childTnLst>
+                    </p:cTn>
+                  </p:par>
+                  <p:par>
+                    <p:cTn id="21" fill="hold">
+                      <p:stCondLst>
+                        <p:cond delay="indefinite"/>
+                      </p:stCondLst>
+                      <p:childTnLst>
+                        <p:par>
+                          <p:cTn id="22" fill="hold">
+                            <p:stCondLst>
+                              <p:cond delay="0"/>
+                            </p:stCondLst>
+                            <p:childTnLst>
+                              <p:par>
+                                <p:cTn id="24" presetID="1" presetClass="entr" presetSubtype="0" fill="hold" grpId="0" nodeType="clickEffect">
+                                  <p:stCondLst>
+                                    <p:cond delay="0"/>
+                                  </p:stCondLst>
+                                  <p:childTnLst>
+                                    <p:set>
+                                      <p:cBhvr>
+                                        <p:cTn id="23" dur="1" fill="hold">
+                                          <p:stCondLst>
+                                            <p:cond delay="0"/>
+                                          </p:stCondLst>
+                                        </p:cTn>
+                                        <p:tgtEl>
+                                          <p:spTgt spid="26"/>
+                                        </p:tgtEl>
+                                        <p:attrNameLst>
+                                          <p:attrName>style.visibility</p:attrName>
+                                        </p:attrNameLst>
+                                      </p:cBhvr>
+                                      <p:to>
+                                        <p:strVal val="visible"/>
+                                      </p:to>
+                                    </p:set>
+                                  </p:childTnLst>
+                                </p:cTn>
+                              </p:par>
+                              <p:par>
+                                <p:cTn id="26" presetID="1" presetClass="entr" presetSubtype="0" fill="hold" grpId="0" nodeType="withEffect">
+                                  <p:stCondLst>
+                                    <p:cond delay="0"/>
+                                  </p:stCondLst>
+                                  <p:childTnLst>
+                                    <p:set>
+                                      <p:cBhvr>
+                                        <p:cTn id="25" dur="1" fill="hold">
+                                          <p:stCondLst>
+                                            <p:cond delay="0"/>
+                                          </p:stCondLst>
+                                        </p:cTn>
+                                        <p:tgtEl>
+                                          <p:spTgt spid="27"/>
+                                        </p:tgtEl>
+                                        <p:attrNameLst>
+                                          <p:attrName>style.visibility</p:attrName>
+                                        </p:attrNameLst>
+                                      </p:cBhvr>
+                                      <p:to>
+                                        <p:strVal val="visible"/>
+                                      </p:to>
+                                    </p:set>
+                                  </p:childTnLst>
+                                </p:cTn>
+                              </p:par>
+                            </p:childTnLst>
+                          </p:cTn>
+                        </p:par>
+                      </p:childTnLst>
+                    </p:cTn>
+                  </p:par>
+                  <p:par>
+                    <p:cTn id="27" fill="hold">
+                      <p:stCondLst>
+                        <p:cond delay="indefinite"/>
+                      </p:stCondLst>
+                      <p:childTnLst>
+                        <p:par>
+                          <p:cTn id="28" fill="hold">
+                            <p:stCondLst>
+                              <p:cond delay="0"/>
+                            </p:stCondLst>
+                            <p:childTnLst>
+                              <p:par>
+                                <p:cTn id="30" presetID="1" presetClass="entr" presetSubtype="0" fill="hold" grpId="0" nodeType="clickEffect">
+                                  <p:stCondLst>
+                                    <p:cond delay="0"/>
+                                  </p:stCondLst>
+                                  <p:childTnLst>
+                                    <p:set>
+                                      <p:cBhvr>
+                                        <p:cTn id="29" dur="1" fill="hold">
+                                          <p:stCondLst>
+                                            <p:cond delay="0"/>
+                                          </p:stCondLst>
+                                        </p:cTn>
+                                        <p:tgtEl>
+                                          <p:spTgt spid="30"/>
+                                        </p:tgtEl>
+                                        <p:attrNameLst>
+                                          <p:attrName>style.visibility</p:attrName>
+                                        </p:attrNameLst>
+                                      </p:cBhvr>
+                                      <p:to>
+                                        <p:strVal val="visible"/>
+                                      </p:to>
+                                    </p:set>
+                                  </p:childTnLst>
+                                </p:cTn>
+                              </p:par>
+                              <p:par>
+                                <p:cTn id="32" presetID="1" presetClass="entr" presetSubtype="0" fill="hold" grpId="0" nodeType="withEffect">
+                                  <p:stCondLst>
+                                    <p:cond delay="0"/>
+                                  </p:stCondLst>
+                                  <p:childTnLst>
+                                    <p:set>
+                                      <p:cBhvr>
+                                        <p:cTn id="31" dur="1" fill="hold">
+                                          <p:stCondLst>
+                                            <p:cond delay="0"/>
+                                          </p:stCondLst>
+                                        </p:cTn>
+                                        <p:tgtEl>
+                                          <p:spTgt spid="31"/>
+                                        </p:tgtEl>
+                                        <p:attrNameLst>
+                                          <p:attrName>style.visibility</p:attrName>
+                                        </p:attrNameLst>
+                                      </p:cBhvr>
+                                      <p:to>
+                                        <p:strVal val="visible"/>
+                                      </p:to>
+                                    </p:set>
+                                  </p:childTnLst>
+                                </p:cTn>
+                              </p:par>
+                            </p:childTnLst>
+                          </p:cTn>
+                        </p:par>
+                      </p:childTnLst>
+                    </p:cTn>
+                  </p:par>
+                  <p:par>
+                    <p:cTn id="33" fill="hold">
+                      <p:stCondLst>
+                        <p:cond delay="indefinite"/>
+                      </p:stCondLst>
+                      <p:childTnLst>
+                        <p:par>
+                          <p:cTn id="34" fill="hold">
+                            <p:stCondLst>
+                              <p:cond delay="0"/>
+                            </p:stCondLst>
+                            <p:childTnLst>
+                              <p:par>
+                                <p:cTn id="36" presetID="1" presetClass="entr" presetSubtype="0" fill="hold" grpId="0" nodeType="clickEffect">
+                                  <p:stCondLst>
+                                    <p:cond delay="0"/>
+                                  </p:stCondLst>
+                                  <p:childTnLst>
+                                    <p:set>
+                                      <p:cBhvr>
+                                        <p:cTn id="35" dur="1" fill="hold">
+                                          <p:stCondLst>
+                                            <p:cond delay="0"/>
+                                          </p:stCondLst>
+                                        </p:cTn>
+                                        <p:tgtEl>
+                                          <p:spTgt spid="34"/>
+                                        </p:tgtEl>
+                                        <p:attrNameLst>
+                                          <p:attrName>style.visibility</p:attrName>
+                                        </p:attrNameLst>
+                                      </p:cBhvr>
+                                      <p:to>
+                                        <p:strVal val="visible"/>
+                                      </p:to>
+                                    </p:set>
+                                  </p:childTnLst>
+                                </p:cTn>
+                              </p:par>
+                              <p:par>
+                                <p:cTn id="38" presetID="1" presetClass="entr" presetSubtype="0" fill="hold" grpId="0" nodeType="withEffect">
+                                  <p:stCondLst>
+                                    <p:cond delay="0"/>
+                                  </p:stCondLst>
+                                  <p:childTnLst>
+                                    <p:set>
+                                      <p:cBhvr>
+                                        <p:cTn id="37" dur="1" fill="hold">
+                                          <p:stCondLst>
+                                            <p:cond delay="0"/>
+                                          </p:stCondLst>
+                                        </p:cTn>
+                                        <p:tgtEl>
+                                          <p:spTgt spid="35"/>
+                                        </p:tgtEl>
+                                        <p:attrNameLst>
+                                          <p:attrName>style.visibility</p:attrName>
+                                        </p:attrNameLst>
+                                      </p:cBhvr>
+                                      <p:to>
+                                        <p:strVal val="visible"/>
+                                      </p:to>
+                                    </p:set>
+                                  </p:childTnLst>
+                                </p:cTn>
+                              </p:par>
+                            </p:childTnLst>
+                          </p:cTn>
+                        </p:par>
+                      </p:childTnLst>
+                    </p:cTn>
+                  </p:par>
+                  <p:par>
+                    <p:cTn id="39" fill="hold">
+                      <p:stCondLst>
+                        <p:cond delay="indefinite"/>
+                      </p:stCondLst>
+                      <p:childTnLst>
+                        <p:par>
+                          <p:cTn id="40" fill="hold">
+                            <p:stCondLst>
+                              <p:cond delay="0"/>
+                            </p:stCondLst>
+                            <p:childTnLst>
+                              <p:par>
+                                <p:cTn id="42" presetID="1" presetClass="entr" presetSubtype="0" fill="hold" grpId="0" nodeType="clickEffect">
+                                  <p:stCondLst>
+                                    <p:cond delay="0"/>
+                                  </p:stCondLst>
+                                  <p:childTnLst>
+                                    <p:set>
+                                      <p:cBhvr>
+                                        <p:cTn id="41" dur="1" fill="hold">
+                                          <p:stCondLst>
+                                            <p:cond delay="0"/>
+                                          </p:stCondLst>
+                                        </p:cTn>
+                                        <p:tgtEl>
+                                          <p:spTgt spid="11"/>
+                                        </p:tgtEl>
+                                        <p:attrNameLst>
+                                          <p:attrName>style.visibility</p:attrName>
+                                        </p:attrNameLst>
+                                      </p:cBhvr>
+                                      <p:to>
+                                        <p:strVal val="visible"/>
+                                      </p:to>
+                                    </p:set>
+                                  </p:childTnLst>
+                                </p:cTn>
+                              </p:par>
+                              <p:par>
+                                <p:cTn id="44" presetID="1" presetClass="entr" presetSubtype="0" fill="hold" grpId="0" nodeType="withEffect">
+                                  <p:stCondLst>
+                                    <p:cond delay="0"/>
+                                  </p:stCondLst>
+                                  <p:childTnLst>
+                                    <p:set>
+                                      <p:cBhvr>
+                                        <p:cTn id="43" dur="1" fill="hold">
+                                          <p:stCondLst>
+                                            <p:cond delay="0"/>
+                                          </p:stCondLst>
+                                        </p:cTn>
+                                        <p:tgtEl>
+                                          <p:spTgt spid="24"/>
+                                        </p:tgtEl>
+                                        <p:attrNameLst>
+                                          <p:attrName>style.visibility</p:attrName>
+                                        </p:attrNameLst>
+                                      </p:cBhvr>
+                                      <p:to>
+                                        <p:strVal val="visible"/>
+                                      </p:to>
+                                    </p:set>
+                                  </p:childTnLst>
+                                </p:cTn>
+                              </p:par>
+                              <p:par>
+                                <p:cTn id="46" presetID="1" presetClass="entr" presetSubtype="0" fill="hold" grpId="0" nodeType="withEffect">
+                                  <p:stCondLst>
+                                    <p:cond delay="0"/>
+                                  </p:stCondLst>
+                                  <p:childTnLst>
+                                    <p:set>
+                                      <p:cBhvr>
+                                        <p:cTn id="45" dur="1" fill="hold">
+                                          <p:stCondLst>
+                                            <p:cond delay="0"/>
+                                          </p:stCondLst>
+                                        </p:cTn>
+                                        <p:tgtEl>
+                                          <p:spTgt spid="36"/>
+                                        </p:tgtEl>
+                                        <p:attrNameLst>
+                                          <p:attrName>style.visibility</p:attrName>
+                                        </p:attrNameLst>
+                                      </p:cBhvr>
+                                      <p:to>
+                                        <p:strVal val="visible"/>
+                                      </p:to>
+                                    </p:set>
+                                  </p:childTnLst>
+                                </p:cTn>
+                              </p:par>
+                              <p:par>
+                                <p:cTn id="48" presetID="1" presetClass="entr" presetSubtype="0" fill="hold" grpId="0" nodeType="withEffect">
+                                  <p:stCondLst>
+                                    <p:cond delay="0"/>
+                                  </p:stCondLst>
+                                  <p:childTnLst>
+                                    <p:set>
+                                      <p:cBhvr>
+                                        <p:cTn id="47" dur="1" fill="hold">
+                                          <p:stCondLst>
+                                            <p:cond delay="0"/>
+                                          </p:stCondLst>
+                                        </p:cTn>
+                                        <p:tgtEl>
+                                          <p:spTgt spid="37"/>
+                                        </p:tgtEl>
+                                        <p:attrNameLst>
+                                          <p:attrName>style.visibility</p:attrName>
+                                        </p:attrNameLst>
+                                      </p:cBhvr>
+                                      <p:to>
+                                        <p:strVal val="visible"/>
+                                      </p:to>
+                                    </p:set>
+                                  </p:childTnLst>
+                                </p:cTn>
+                              </p:par>
+                              <p:par>
+                                <p:cTn id="50" presetID="1" presetClass="entr" presetSubtype="0" fill="hold" nodeType="withEffect">
+                                  <p:stCondLst>
+                                    <p:cond delay="0"/>
+                                  </p:stCondLst>
+                                  <p:childTnLst>
+                                    <p:set>
+                                      <p:cBhvr>
+                                        <p:cTn id="49" dur="1" fill="hold">
+                                          <p:stCondLst>
+                                            <p:cond delay="0"/>
+                                          </p:stCondLst>
+                                        </p:cTn>
+                                        <p:tgtEl>
+                                          <p:spTgt spid="38"/>
+                                        </p:tgtEl>
+                                        <p:attrNameLst>
+                                          <p:attrName>style.visibility</p:attrName>
+                                        </p:attrNameLst>
+                                      </p:cBhvr>
+                                      <p:to>
+                                        <p:strVal val="visible"/>
+                                      </p:to>
+                                    </p:set>
+                                  </p:childTnLst>
+                                </p:cTn>
+                              </p:par>
+                              <p:par>
+                                <p:cTn id="52" presetID="1" presetClass="entr" presetSubtype="0" fill="hold" grpId="0" nodeType="withEffect">
+                                  <p:stCondLst>
+                                    <p:cond delay="0"/>
+                                  </p:stCondLst>
+                                  <p:childTnLst>
+                                    <p:set>
+                                      <p:cBhvr>
+                                        <p:cTn id="51" dur="1" fill="hold">
+                                          <p:stCondLst>
+                                            <p:cond delay="0"/>
+                                          </p:stCondLst>
+                                        </p:cTn>
+                                        <p:tgtEl>
+                                          <p:spTgt spid="39"/>
+                                        </p:tgtEl>
+                                        <p:attrNameLst>
+                                          <p:attrName>style.visibility</p:attrName>
+                                        </p:attrNameLst>
+                                      </p:cBhvr>
+                                      <p:to>
+                                        <p:strVal val="visible"/>
+                                      </p:to>
+                                    </p:set>
+                                  </p:childTnLst>
+                                </p:cTn>
+                              </p:par>
+                            </p:childTnLst>
+                          </p:cTn>
+                        </p:par>
+                      </p:childTnLst>
+                    </p:cTn>
+                  </p:par>
+                </p:childTnLst>
+              </p:cTn>
+              <p:prevCondLst>
+                <p:cond evt="onPrev" delay="0">
+                  <p:tgtEl>
+                    <p:sldTgt/>
+                  </p:tgtEl>
+                </p:cond>
+              </p:prevCondLst>
+              <p:nextCondLst>
+                <p:cond evt="onNext" delay="0">
+                  <p:tgtEl>
+                    <p:sldTgt/>
+                  </p:tgtEl>
+                </p:cond>
+              </p:nextCondLst>
+            </p:seq>
+          </p:childTnLst>
+        </p:cTn>
+      </p:par>
+    </p:tnLst>
+    <p:bldLst>
+      <p:bldP spid="13" grpId="0" animBg="1"/>
+      <p:bldP spid="14" grpId="0" animBg="1"/>
+      <p:bldP spid="17" grpId="0" animBg="1"/>
+      <p:bldP spid="18" grpId="0" animBg="1"/>
+      <p:bldP spid="21" grpId="0" animBg="1"/>
+      <p:bldP spid="22" grpId="0" animBg="1"/>
+      <p:bldP spid="26" grpId="0" animBg="1"/>
+      <p:bldP spid="27" grpId="0" animBg="1"/>
+      <p:bldP spid="30" grpId="0" animBg="1"/>
+      <p:bldP spid="31" grpId="0" animBg="1"/>
+      <p:bldP spid="34" grpId="0" animBg="1"/>
+      <p:bldP spid="35" grpId="0" animBg="1"/>
+      <p:bldP spid="11" grpId="0" animBg="1"/>
+      <p:bldP spid="24" grpId="0" animBg="1"/>
+      <p:bldP spid="36" grpId="0" animBg="1"/>
+      <p:bldP spid="37" grpId="0" animBg="1"/>
+      <p:bldP spid="39" grpId="0" animBg="1"/>
+    </p:bldLst>
+  </p:timing>
 </p:sld>
 </file>
 
